--- a/prometheus-single-page.pptx
+++ b/prometheus-single-page.pptx
@@ -5,9 +5,9 @@
     <p:sldMasterId id="2147483648" r:id="rId1"/>
   </p:sldMasterIdLst>
   <p:sldIdLst>
-    <p:sldId id="256" r:id="rId7"/>
+    <p:sldId id="256" r:id="rId2"/>
   </p:sldIdLst>
-  <p:sldSz cx="12191695" cy="8686800" type="screen4x3"/>
+  <p:sldSz cx="12192000" cy="8686800"/>
   <p:notesSz cx="6858000" cy="9144000"/>
   <p:defaultTextStyle>
     <a:defPPr>
@@ -104,6 +104,22 @@
       </a:defRPr>
     </a:lvl9pPr>
   </p:defaultTextStyle>
+  <p:extLst>
+    <p:ext uri="{EFAFB233-063F-42B5-8137-9DF3F51BA10A}">
+      <p15:sldGuideLst xmlns:p15="http://schemas.microsoft.com/office/powerpoint/2012/main">
+        <p15:guide id="1" orient="horz" pos="2160">
+          <p15:clr>
+            <a:srgbClr val="A4A3A4"/>
+          </p15:clr>
+        </p15:guide>
+        <p15:guide id="2" pos="2880">
+          <p15:clr>
+            <a:srgbClr val="A4A3A4"/>
+          </p15:clr>
+        </p15:guide>
+      </p15:sldGuideLst>
+    </p:ext>
+  </p:extLst>
 </p:presentation>
 </file>
 
@@ -288,7 +304,7 @@
           <a:p>
             <a:fld id="{5BCAD085-E8A6-8845-BD4E-CB4CCA059FC4}" type="datetimeFigureOut">
               <a:rPr lang="en-US" smtClean="0"/>
-              <a:t>1/27/13</a:t>
+              <a:t>10/30/2026</a:t>
             </a:fld>
             <a:endParaRPr lang="en-US"/>
           </a:p>
@@ -458,7 +474,7 @@
           <a:p>
             <a:fld id="{5BCAD085-E8A6-8845-BD4E-CB4CCA059FC4}" type="datetimeFigureOut">
               <a:rPr lang="en-US" smtClean="0"/>
-              <a:t>1/27/13</a:t>
+              <a:t>10/30/2026</a:t>
             </a:fld>
             <a:endParaRPr lang="en-US"/>
           </a:p>
@@ -638,7 +654,7 @@
           <a:p>
             <a:fld id="{5BCAD085-E8A6-8845-BD4E-CB4CCA059FC4}" type="datetimeFigureOut">
               <a:rPr lang="en-US" smtClean="0"/>
-              <a:t>1/27/13</a:t>
+              <a:t>10/30/2026</a:t>
             </a:fld>
             <a:endParaRPr lang="en-US"/>
           </a:p>
@@ -808,7 +824,7 @@
           <a:p>
             <a:fld id="{5BCAD085-E8A6-8845-BD4E-CB4CCA059FC4}" type="datetimeFigureOut">
               <a:rPr lang="en-US" smtClean="0"/>
-              <a:t>1/27/13</a:t>
+              <a:t>10/30/2026</a:t>
             </a:fld>
             <a:endParaRPr lang="en-US"/>
           </a:p>
@@ -1054,7 +1070,7 @@
           <a:p>
             <a:fld id="{5BCAD085-E8A6-8845-BD4E-CB4CCA059FC4}" type="datetimeFigureOut">
               <a:rPr lang="en-US" smtClean="0"/>
-              <a:t>1/27/13</a:t>
+              <a:t>10/30/2026</a:t>
             </a:fld>
             <a:endParaRPr lang="en-US"/>
           </a:p>
@@ -1342,7 +1358,7 @@
           <a:p>
             <a:fld id="{5BCAD085-E8A6-8845-BD4E-CB4CCA059FC4}" type="datetimeFigureOut">
               <a:rPr lang="en-US" smtClean="0"/>
-              <a:t>1/27/13</a:t>
+              <a:t>10/30/2026</a:t>
             </a:fld>
             <a:endParaRPr lang="en-US"/>
           </a:p>
@@ -1764,7 +1780,7 @@
           <a:p>
             <a:fld id="{5BCAD085-E8A6-8845-BD4E-CB4CCA059FC4}" type="datetimeFigureOut">
               <a:rPr lang="en-US" smtClean="0"/>
-              <a:t>1/27/13</a:t>
+              <a:t>10/30/2026</a:t>
             </a:fld>
             <a:endParaRPr lang="en-US"/>
           </a:p>
@@ -1882,7 +1898,7 @@
           <a:p>
             <a:fld id="{5BCAD085-E8A6-8845-BD4E-CB4CCA059FC4}" type="datetimeFigureOut">
               <a:rPr lang="en-US" smtClean="0"/>
-              <a:t>1/27/13</a:t>
+              <a:t>10/30/2026</a:t>
             </a:fld>
             <a:endParaRPr lang="en-US"/>
           </a:p>
@@ -1977,7 +1993,7 @@
           <a:p>
             <a:fld id="{5BCAD085-E8A6-8845-BD4E-CB4CCA059FC4}" type="datetimeFigureOut">
               <a:rPr lang="en-US" smtClean="0"/>
-              <a:t>1/27/13</a:t>
+              <a:t>10/30/2026</a:t>
             </a:fld>
             <a:endParaRPr lang="en-US"/>
           </a:p>
@@ -2254,7 +2270,7 @@
           <a:p>
             <a:fld id="{5BCAD085-E8A6-8845-BD4E-CB4CCA059FC4}" type="datetimeFigureOut">
               <a:rPr lang="en-US" smtClean="0"/>
-              <a:t>1/27/13</a:t>
+              <a:t>10/30/2026</a:t>
             </a:fld>
             <a:endParaRPr lang="en-US"/>
           </a:p>
@@ -2507,7 +2523,7 @@
           <a:p>
             <a:fld id="{5BCAD085-E8A6-8845-BD4E-CB4CCA059FC4}" type="datetimeFigureOut">
               <a:rPr lang="en-US" smtClean="0"/>
-              <a:t>1/27/13</a:t>
+              <a:t>10/30/2026</a:t>
             </a:fld>
             <a:endParaRPr lang="en-US"/>
           </a:p>
@@ -2720,7 +2736,7 @@
           <a:p>
             <a:fld id="{5BCAD085-E8A6-8845-BD4E-CB4CCA059FC4}" type="datetimeFigureOut">
               <a:rPr lang="en-US" smtClean="0"/>
-              <a:t>1/27/13</a:t>
+              <a:t>10/30/2026</a:t>
             </a:fld>
             <a:endParaRPr lang="en-US"/>
           </a:p>
@@ -3079,7 +3095,7 @@
 </file>
 
 <file path=ppt/slides/slide1.xml><?xml version="1.0" encoding="utf-8"?>
-<p:sld xmlns:a="http://schemas.openxmlformats.org/drawingml/2006/main" xmlns:p="http://schemas.openxmlformats.org/presentationml/2006/main" xmlns:r="http://schemas.openxmlformats.org/officeDocument/2006/relationships">
+<p:sld xmlns:a="http://schemas.openxmlformats.org/drawingml/2006/main" xmlns:r="http://schemas.openxmlformats.org/officeDocument/2006/relationships" xmlns:p="http://schemas.openxmlformats.org/presentationml/2006/main">
   <p:cSld>
     <p:spTree>
       <p:nvGrpSpPr>
@@ -3087,7 +3103,14 @@
         <p:cNvGrpSpPr/>
         <p:nvPr/>
       </p:nvGrpSpPr>
-      <p:grpSpPr/>
+      <p:grpSpPr>
+        <a:xfrm>
+          <a:off x="0" y="0"/>
+          <a:ext cx="0" cy="0"/>
+          <a:chOff x="0" y="0"/>
+          <a:chExt cx="0" cy="0"/>
+        </a:xfrm>
+      </p:grpSpPr>
       <p:sp>
         <p:nvSpPr>
           <p:cNvPr id="2" name="main_title"/>
@@ -3105,12 +3128,12 @@
           <a:noFill/>
         </p:spPr>
         <p:txBody>
-          <a:bodyPr wrap="square" lIns="18288" rIns="18288" tIns="9144" bIns="9144" anchor="ctr">
+          <a:bodyPr wrap="square" lIns="18288" tIns="9144" rIns="18288" bIns="9144" anchor="ctr">
             <a:noAutofit/>
           </a:bodyPr>
           <a:lstStyle/>
           <a:p>
-            <a:pPr rtl="1" algn="ctr">
+            <a:pPr algn="ctr" rtl="1">
               <a:lnSpc>
                 <a:spcPct val="100000"/>
               </a:lnSpc>
@@ -3122,62 +3145,15 @@
               </a:spcAft>
             </a:pPr>
             <a:r>
-              <a:rPr sz="1900" b="1" i="0">
+              <a:rPr sz="3200" b="1" i="0">
                 <a:solidFill>
                   <a:srgbClr val="1F3864"/>
                 </a:solidFill>
                 <a:latin typeface="Tahoma"/>
                 <a:ea typeface="Tahoma"/>
-                <a:cs typeface="Tahoma"/>
+                <a:cs typeface="B Nazanin" panose="00000400000000000000" pitchFamily="2" charset="-78"/>
               </a:rPr>
               <a:t>پرامتئوس: پیش‌بینی فرآیند با درک تأخیر و سه جریان موازی</a:t>
-            </a:r>
-          </a:p>
-        </p:txBody>
-      </p:sp>
-      <p:sp>
-        <p:nvSpPr>
-          <p:cNvPr id="3" name="subtitle"/>
-          <p:cNvSpPr txBox="1"/>
-          <p:nvPr/>
-        </p:nvSpPr>
-        <p:spPr>
-          <a:xfrm>
-            <a:off x="384048" y="640080"/>
-            <a:ext cx="10042855" cy="292608"/>
-          </a:xfrm>
-          <a:prstGeom prst="rect">
-            <a:avLst/>
-          </a:prstGeom>
-          <a:noFill/>
-        </p:spPr>
-        <p:txBody>
-          <a:bodyPr wrap="square" lIns="18288" rIns="18288" tIns="9144" bIns="9144" anchor="ctr">
-            <a:noAutofit/>
-          </a:bodyPr>
-          <a:lstStyle/>
-          <a:p>
-            <a:pPr rtl="1" algn="ctr">
-              <a:lnSpc>
-                <a:spcPct val="100000"/>
-              </a:lnSpc>
-              <a:spcBef>
-                <a:spcPts val="0"/>
-              </a:spcBef>
-              <a:spcAft>
-                <a:spcPts val="0"/>
-              </a:spcAft>
-            </a:pPr>
-            <a:r>
-              <a:rPr sz="850" b="0" i="0">
-                <a:solidFill>
-                  <a:srgbClr val="6B7280"/>
-                </a:solidFill>
-                <a:latin typeface="Tahoma"/>
-                <a:ea typeface="Tahoma"/>
-                <a:cs typeface="Tahoma"/>
-              </a:rPr>
-              <a:t>معماری از main.py (مدل اصلی) و utils.py (پیاده‌سازی گراف عصبی پیشوند)</a:t>
             </a:r>
           </a:p>
         </p:txBody>
@@ -3190,7 +3166,7 @@
         </p:nvSpPr>
         <p:spPr>
           <a:xfrm>
-            <a:off x="10664647" y="1024128"/>
+            <a:off x="71402" y="1054577"/>
             <a:ext cx="1143000" cy="2438430"/>
           </a:xfrm>
           <a:prstGeom prst="roundRect">
@@ -3221,7 +3197,7 @@
           </a:fontRef>
         </p:style>
         <p:txBody>
-          <a:bodyPr rtlCol="0" anchor="ctr" wrap="square" lIns="45720" rIns="45720" vert="vert270">
+          <a:bodyPr vert="vert270" wrap="square" lIns="45720" rIns="45720" rtlCol="0" anchor="ctr">
             <a:noAutofit/>
           </a:bodyPr>
           <a:lstStyle/>
@@ -3238,19 +3214,30 @@
               </a:spcAft>
             </a:pPr>
             <a:r>
-              <a:rPr sz="1200" b="1" i="0">
+              <a:rPr sz="2000" b="1" i="0" dirty="0" err="1">
                 <a:solidFill>
                   <a:srgbClr val="FFFFFF"/>
                 </a:solidFill>
                 <a:latin typeface="Tahoma"/>
                 <a:ea typeface="Tahoma"/>
-                <a:cs typeface="Tahoma"/>
-              </a:rPr>
-              <a:t>فاز ۱</a:t>
-            </a:r>
-          </a:p>
-          <a:p>
-            <a:pPr rtl="1" algn="ctr">
+                <a:cs typeface="B Nazanin" panose="00000400000000000000" pitchFamily="2" charset="-78"/>
+              </a:rPr>
+              <a:t>فاز</a:t>
+            </a:r>
+            <a:r>
+              <a:rPr sz="2000" b="1" i="0" dirty="0">
+                <a:solidFill>
+                  <a:srgbClr val="FFFFFF"/>
+                </a:solidFill>
+                <a:latin typeface="Tahoma"/>
+                <a:ea typeface="Tahoma"/>
+                <a:cs typeface="B Nazanin" panose="00000400000000000000" pitchFamily="2" charset="-78"/>
+              </a:rPr>
+              <a:t> ۱</a:t>
+            </a:r>
+          </a:p>
+          <a:p>
+            <a:pPr algn="ctr" rtl="1">
               <a:lnSpc>
                 <a:spcPct val="100000"/>
               </a:lnSpc>
@@ -3262,19 +3249,49 @@
               </a:spcAft>
             </a:pPr>
             <a:r>
-              <a:rPr sz="800" b="0" i="0">
+              <a:rPr sz="1100" b="0" i="0" dirty="0" err="1">
                 <a:solidFill>
                   <a:srgbClr val="D5DEEC"/>
                 </a:solidFill>
                 <a:latin typeface="Tahoma"/>
                 <a:ea typeface="Tahoma"/>
-                <a:cs typeface="Tahoma"/>
-              </a:rPr>
-              <a:t>مشخصات سیستم</a:t>
-            </a:r>
-          </a:p>
-          <a:p>
-            <a:pPr rtl="1" algn="ctr">
+                <a:cs typeface="B Nazanin" panose="00000400000000000000" pitchFamily="2" charset="-78"/>
+              </a:rPr>
+              <a:t>مشخصات</a:t>
+            </a:r>
+            <a:r>
+              <a:rPr sz="1100" b="0" i="0" dirty="0">
+                <a:solidFill>
+                  <a:srgbClr val="D5DEEC"/>
+                </a:solidFill>
+                <a:latin typeface="Tahoma"/>
+                <a:ea typeface="Tahoma"/>
+                <a:cs typeface="B Nazanin" panose="00000400000000000000" pitchFamily="2" charset="-78"/>
+              </a:rPr>
+              <a:t> </a:t>
+            </a:r>
+            <a:r>
+              <a:rPr sz="1100" b="0" i="0" dirty="0" err="1">
+                <a:solidFill>
+                  <a:srgbClr val="D5DEEC"/>
+                </a:solidFill>
+                <a:latin typeface="Tahoma"/>
+                <a:ea typeface="Tahoma"/>
+                <a:cs typeface="B Nazanin" panose="00000400000000000000" pitchFamily="2" charset="-78"/>
+              </a:rPr>
+              <a:t>سیستم</a:t>
+            </a:r>
+            <a:endParaRPr sz="1100" b="0" i="0" dirty="0">
+              <a:solidFill>
+                <a:srgbClr val="D5DEEC"/>
+              </a:solidFill>
+              <a:latin typeface="Tahoma"/>
+              <a:ea typeface="Tahoma"/>
+              <a:cs typeface="B Nazanin" panose="00000400000000000000" pitchFamily="2" charset="-78"/>
+            </a:endParaRPr>
+          </a:p>
+          <a:p>
+            <a:pPr algn="ctr" rtl="1">
               <a:lnSpc>
                 <a:spcPct val="100000"/>
               </a:lnSpc>
@@ -3286,16 +3303,68 @@
               </a:spcAft>
             </a:pPr>
             <a:r>
-              <a:rPr sz="800" b="0" i="0">
+              <a:rPr sz="1100" b="0" i="0" dirty="0" err="1">
                 <a:solidFill>
                   <a:srgbClr val="D5DEEC"/>
                 </a:solidFill>
                 <a:latin typeface="Tahoma"/>
                 <a:ea typeface="Tahoma"/>
-                <a:cs typeface="Tahoma"/>
-              </a:rPr>
-              <a:t>ورودی • وظایف • خروجی</a:t>
-            </a:r>
+                <a:cs typeface="B Nazanin" panose="00000400000000000000" pitchFamily="2" charset="-78"/>
+              </a:rPr>
+              <a:t>ورودی</a:t>
+            </a:r>
+            <a:r>
+              <a:rPr sz="1100" b="0" i="0" dirty="0">
+                <a:solidFill>
+                  <a:srgbClr val="D5DEEC"/>
+                </a:solidFill>
+                <a:latin typeface="Tahoma"/>
+                <a:ea typeface="Tahoma"/>
+                <a:cs typeface="B Nazanin" panose="00000400000000000000" pitchFamily="2" charset="-78"/>
+              </a:rPr>
+              <a:t> • </a:t>
+            </a:r>
+            <a:r>
+              <a:rPr sz="1100" b="0" i="0" dirty="0" err="1">
+                <a:solidFill>
+                  <a:srgbClr val="D5DEEC"/>
+                </a:solidFill>
+                <a:latin typeface="Tahoma"/>
+                <a:ea typeface="Tahoma"/>
+                <a:cs typeface="B Nazanin" panose="00000400000000000000" pitchFamily="2" charset="-78"/>
+              </a:rPr>
+              <a:t>وظایف</a:t>
+            </a:r>
+            <a:r>
+              <a:rPr sz="1100" b="0" i="0" dirty="0">
+                <a:solidFill>
+                  <a:srgbClr val="D5DEEC"/>
+                </a:solidFill>
+                <a:latin typeface="Tahoma"/>
+                <a:ea typeface="Tahoma"/>
+                <a:cs typeface="B Nazanin" panose="00000400000000000000" pitchFamily="2" charset="-78"/>
+              </a:rPr>
+              <a:t> • </a:t>
+            </a:r>
+            <a:r>
+              <a:rPr sz="1100" b="0" i="0" dirty="0" err="1">
+                <a:solidFill>
+                  <a:srgbClr val="D5DEEC"/>
+                </a:solidFill>
+                <a:latin typeface="Tahoma"/>
+                <a:ea typeface="Tahoma"/>
+                <a:cs typeface="B Nazanin" panose="00000400000000000000" pitchFamily="2" charset="-78"/>
+              </a:rPr>
+              <a:t>خروجی</a:t>
+            </a:r>
+            <a:endParaRPr sz="1100" b="0" i="0" dirty="0">
+              <a:solidFill>
+                <a:srgbClr val="D5DEEC"/>
+              </a:solidFill>
+              <a:latin typeface="Tahoma"/>
+              <a:ea typeface="Tahoma"/>
+              <a:cs typeface="B Nazanin" panose="00000400000000000000" pitchFamily="2" charset="-78"/>
+            </a:endParaRPr>
           </a:p>
         </p:txBody>
       </p:sp>
@@ -3307,7 +3376,7 @@
         </p:nvSpPr>
         <p:spPr>
           <a:xfrm>
-            <a:off x="10664647" y="3553998"/>
+            <a:off x="71402" y="3584447"/>
             <a:ext cx="1143000" cy="2438430"/>
           </a:xfrm>
           <a:prstGeom prst="roundRect">
@@ -3338,7 +3407,7 @@
           </a:fontRef>
         </p:style>
         <p:txBody>
-          <a:bodyPr rtlCol="0" anchor="ctr" wrap="square" lIns="45720" rIns="45720" vert="vert270">
+          <a:bodyPr vert="vert270" wrap="square" lIns="45720" rIns="45720" rtlCol="0" anchor="ctr">
             <a:noAutofit/>
           </a:bodyPr>
           <a:lstStyle/>
@@ -3355,19 +3424,30 @@
               </a:spcAft>
             </a:pPr>
             <a:r>
-              <a:rPr sz="1200" b="1" i="0">
+              <a:rPr sz="2000" b="1" i="0" dirty="0" err="1">
                 <a:solidFill>
                   <a:srgbClr val="FFFFFF"/>
                 </a:solidFill>
                 <a:latin typeface="Tahoma"/>
                 <a:ea typeface="Tahoma"/>
-                <a:cs typeface="Tahoma"/>
-              </a:rPr>
-              <a:t>فاز ۲</a:t>
-            </a:r>
-          </a:p>
-          <a:p>
-            <a:pPr rtl="1" algn="ctr">
+                <a:cs typeface="B Nazanin" panose="00000400000000000000" pitchFamily="2" charset="-78"/>
+              </a:rPr>
+              <a:t>فاز</a:t>
+            </a:r>
+            <a:r>
+              <a:rPr sz="2000" b="1" i="0" dirty="0">
+                <a:solidFill>
+                  <a:srgbClr val="FFFFFF"/>
+                </a:solidFill>
+                <a:latin typeface="Tahoma"/>
+                <a:ea typeface="Tahoma"/>
+                <a:cs typeface="B Nazanin" panose="00000400000000000000" pitchFamily="2" charset="-78"/>
+              </a:rPr>
+              <a:t> ۲</a:t>
+            </a:r>
+          </a:p>
+          <a:p>
+            <a:pPr algn="ctr" rtl="1">
               <a:lnSpc>
                 <a:spcPct val="100000"/>
               </a:lnSpc>
@@ -3379,19 +3459,49 @@
               </a:spcAft>
             </a:pPr>
             <a:r>
-              <a:rPr sz="800" b="0" i="0">
+              <a:rPr sz="1100" b="0" i="0" dirty="0" err="1">
                 <a:solidFill>
                   <a:srgbClr val="D5DEEC"/>
                 </a:solidFill>
                 <a:latin typeface="Tahoma"/>
                 <a:ea typeface="Tahoma"/>
-                <a:cs typeface="Tahoma"/>
-              </a:rPr>
-              <a:t>طراحی معماری</a:t>
-            </a:r>
-          </a:p>
-          <a:p>
-            <a:pPr rtl="1" algn="ctr">
+                <a:cs typeface="B Nazanin" panose="00000400000000000000" pitchFamily="2" charset="-78"/>
+              </a:rPr>
+              <a:t>طراحی</a:t>
+            </a:r>
+            <a:r>
+              <a:rPr sz="1100" b="0" i="0" dirty="0">
+                <a:solidFill>
+                  <a:srgbClr val="D5DEEC"/>
+                </a:solidFill>
+                <a:latin typeface="Tahoma"/>
+                <a:ea typeface="Tahoma"/>
+                <a:cs typeface="B Nazanin" panose="00000400000000000000" pitchFamily="2" charset="-78"/>
+              </a:rPr>
+              <a:t> </a:t>
+            </a:r>
+            <a:r>
+              <a:rPr sz="1100" b="0" i="0" dirty="0" err="1">
+                <a:solidFill>
+                  <a:srgbClr val="D5DEEC"/>
+                </a:solidFill>
+                <a:latin typeface="Tahoma"/>
+                <a:ea typeface="Tahoma"/>
+                <a:cs typeface="B Nazanin" panose="00000400000000000000" pitchFamily="2" charset="-78"/>
+              </a:rPr>
+              <a:t>معماری</a:t>
+            </a:r>
+            <a:endParaRPr sz="1100" b="0" i="0" dirty="0">
+              <a:solidFill>
+                <a:srgbClr val="D5DEEC"/>
+              </a:solidFill>
+              <a:latin typeface="Tahoma"/>
+              <a:ea typeface="Tahoma"/>
+              <a:cs typeface="B Nazanin" panose="00000400000000000000" pitchFamily="2" charset="-78"/>
+            </a:endParaRPr>
+          </a:p>
+          <a:p>
+            <a:pPr algn="ctr" rtl="1">
               <a:lnSpc>
                 <a:spcPct val="100000"/>
               </a:lnSpc>
@@ -3403,16 +3513,68 @@
               </a:spcAft>
             </a:pPr>
             <a:r>
-              <a:rPr sz="800" b="0" i="0">
+              <a:rPr sz="1100" b="0" i="0" dirty="0" err="1">
                 <a:solidFill>
                   <a:srgbClr val="D5DEEC"/>
                 </a:solidFill>
                 <a:latin typeface="Tahoma"/>
                 <a:ea typeface="Tahoma"/>
-                <a:cs typeface="Tahoma"/>
-              </a:rPr>
-              <a:t>سه جریان موازی</a:t>
-            </a:r>
+                <a:cs typeface="B Nazanin" panose="00000400000000000000" pitchFamily="2" charset="-78"/>
+              </a:rPr>
+              <a:t>سه</a:t>
+            </a:r>
+            <a:r>
+              <a:rPr sz="1100" b="0" i="0" dirty="0">
+                <a:solidFill>
+                  <a:srgbClr val="D5DEEC"/>
+                </a:solidFill>
+                <a:latin typeface="Tahoma"/>
+                <a:ea typeface="Tahoma"/>
+                <a:cs typeface="B Nazanin" panose="00000400000000000000" pitchFamily="2" charset="-78"/>
+              </a:rPr>
+              <a:t> </a:t>
+            </a:r>
+            <a:r>
+              <a:rPr sz="1100" b="0" i="0" dirty="0" err="1">
+                <a:solidFill>
+                  <a:srgbClr val="D5DEEC"/>
+                </a:solidFill>
+                <a:latin typeface="Tahoma"/>
+                <a:ea typeface="Tahoma"/>
+                <a:cs typeface="B Nazanin" panose="00000400000000000000" pitchFamily="2" charset="-78"/>
+              </a:rPr>
+              <a:t>جریان</a:t>
+            </a:r>
+            <a:r>
+              <a:rPr sz="1100" b="0" i="0" dirty="0">
+                <a:solidFill>
+                  <a:srgbClr val="D5DEEC"/>
+                </a:solidFill>
+                <a:latin typeface="Tahoma"/>
+                <a:ea typeface="Tahoma"/>
+                <a:cs typeface="B Nazanin" panose="00000400000000000000" pitchFamily="2" charset="-78"/>
+              </a:rPr>
+              <a:t> </a:t>
+            </a:r>
+            <a:r>
+              <a:rPr sz="1100" b="0" i="0" dirty="0" err="1">
+                <a:solidFill>
+                  <a:srgbClr val="D5DEEC"/>
+                </a:solidFill>
+                <a:latin typeface="Tahoma"/>
+                <a:ea typeface="Tahoma"/>
+                <a:cs typeface="B Nazanin" panose="00000400000000000000" pitchFamily="2" charset="-78"/>
+              </a:rPr>
+              <a:t>موازی</a:t>
+            </a:r>
+            <a:endParaRPr sz="1100" b="0" i="0" dirty="0">
+              <a:solidFill>
+                <a:srgbClr val="D5DEEC"/>
+              </a:solidFill>
+              <a:latin typeface="Tahoma"/>
+              <a:ea typeface="Tahoma"/>
+              <a:cs typeface="B Nazanin" panose="00000400000000000000" pitchFamily="2" charset="-78"/>
+            </a:endParaRPr>
           </a:p>
         </p:txBody>
       </p:sp>
@@ -3424,7 +3586,7 @@
         </p:nvSpPr>
         <p:spPr>
           <a:xfrm>
-            <a:off x="10664647" y="6083777"/>
+            <a:off x="71402" y="6114226"/>
             <a:ext cx="1143000" cy="2438430"/>
           </a:xfrm>
           <a:prstGeom prst="roundRect">
@@ -3455,7 +3617,7 @@
           </a:fontRef>
         </p:style>
         <p:txBody>
-          <a:bodyPr rtlCol="0" anchor="ctr" wrap="square" lIns="45720" rIns="45720" vert="vert270">
+          <a:bodyPr vert="vert270" wrap="square" lIns="45720" rIns="45720" rtlCol="0" anchor="ctr">
             <a:noAutofit/>
           </a:bodyPr>
           <a:lstStyle/>
@@ -3472,19 +3634,19 @@
               </a:spcAft>
             </a:pPr>
             <a:r>
-              <a:rPr sz="1200" b="1" i="0">
+              <a:rPr sz="2000" b="1" i="0">
                 <a:solidFill>
                   <a:srgbClr val="FFFFFF"/>
                 </a:solidFill>
                 <a:latin typeface="Tahoma"/>
                 <a:ea typeface="Tahoma"/>
-                <a:cs typeface="Tahoma"/>
+                <a:cs typeface="B Nazanin" panose="00000400000000000000" pitchFamily="2" charset="-78"/>
               </a:rPr>
               <a:t>فاز ۳</a:t>
             </a:r>
           </a:p>
           <a:p>
-            <a:pPr rtl="1" algn="ctr">
+            <a:pPr algn="ctr" rtl="1">
               <a:lnSpc>
                 <a:spcPct val="100000"/>
               </a:lnSpc>
@@ -3496,19 +3658,19 @@
               </a:spcAft>
             </a:pPr>
             <a:r>
-              <a:rPr sz="800" b="0" i="0">
+              <a:rPr sz="1100" b="0" i="0">
                 <a:solidFill>
                   <a:srgbClr val="D5DEEC"/>
                 </a:solidFill>
                 <a:latin typeface="Tahoma"/>
                 <a:ea typeface="Tahoma"/>
-                <a:cs typeface="Tahoma"/>
+                <a:cs typeface="B Nazanin" panose="00000400000000000000" pitchFamily="2" charset="-78"/>
               </a:rPr>
               <a:t>طراحی جزئی</a:t>
             </a:r>
           </a:p>
           <a:p>
-            <a:pPr rtl="1" algn="ctr">
+            <a:pPr algn="ctr" rtl="1">
               <a:lnSpc>
                 <a:spcPct val="100000"/>
               </a:lnSpc>
@@ -3520,13 +3682,13 @@
               </a:spcAft>
             </a:pPr>
             <a:r>
-              <a:rPr sz="800" b="0" i="0">
+              <a:rPr sz="1100" b="0" i="0">
                 <a:solidFill>
                   <a:srgbClr val="D5DEEC"/>
                 </a:solidFill>
                 <a:latin typeface="Tahoma"/>
                 <a:ea typeface="Tahoma"/>
-                <a:cs typeface="Tahoma"/>
+                <a:cs typeface="B Nazanin" panose="00000400000000000000" pitchFamily="2" charset="-78"/>
               </a:rPr>
               <a:t>لایه‌ها و پارامترها</a:t>
             </a:r>
@@ -3541,7 +3703,7 @@
         </p:nvCxnSpPr>
         <p:spPr>
           <a:xfrm>
-            <a:off x="384048" y="3508278"/>
+            <a:off x="1546864" y="3535709"/>
             <a:ext cx="10042855" cy="0"/>
           </a:xfrm>
           <a:prstGeom prst="line">
@@ -3577,7 +3739,7 @@
         </p:nvCxnSpPr>
         <p:spPr>
           <a:xfrm>
-            <a:off x="384048" y="6038148"/>
+            <a:off x="1546864" y="6065579"/>
             <a:ext cx="10042855" cy="0"/>
           </a:xfrm>
           <a:prstGeom prst="line">
@@ -3613,7 +3775,7 @@
         </p:nvSpPr>
         <p:spPr>
           <a:xfrm>
-            <a:off x="8067065" y="1115568"/>
+            <a:off x="9229881" y="1142999"/>
             <a:ext cx="2359837" cy="1069848"/>
           </a:xfrm>
           <a:prstGeom prst="roundRect">
@@ -3646,7 +3808,7 @@
           </a:fontRef>
         </p:style>
         <p:txBody>
-          <a:bodyPr rtlCol="0" anchor="ctr" wrap="square" lIns="64008" rIns="64008" tIns="27432" bIns="27432">
+          <a:bodyPr wrap="square" lIns="64008" tIns="27432" rIns="64008" bIns="27432" rtlCol="0" anchor="ctr">
             <a:noAutofit/>
           </a:bodyPr>
           <a:lstStyle/>
@@ -3663,19 +3825,19 @@
               </a:spcAft>
             </a:pPr>
             <a:r>
-              <a:rPr sz="950" b="1" i="0">
+              <a:rPr sz="1200" b="1" i="0">
                 <a:solidFill>
                   <a:srgbClr val="1F2A37"/>
                 </a:solidFill>
                 <a:latin typeface="Tahoma"/>
                 <a:ea typeface="Tahoma"/>
-                <a:cs typeface="Tahoma"/>
+                <a:cs typeface="B Nazanin" panose="00000400000000000000" pitchFamily="2" charset="-78"/>
               </a:rPr>
               <a:t>ورودی: لاگ رویداد (XES)</a:t>
             </a:r>
           </a:p>
           <a:p>
-            <a:pPr rtl="1" algn="ctr">
+            <a:pPr algn="ctr" rtl="1">
               <a:lnSpc>
                 <a:spcPct val="100000"/>
               </a:lnSpc>
@@ -3687,19 +3849,19 @@
               </a:spcAft>
             </a:pPr>
             <a:r>
-              <a:rPr sz="750" b="0" i="0">
-                <a:solidFill>
-                  <a:srgbClr val="4B5563"/>
-                </a:solidFill>
-                <a:latin typeface="Tahoma"/>
-                <a:ea typeface="Tahoma"/>
-                <a:cs typeface="Tahoma"/>
+              <a:rPr sz="1050" b="0" i="0">
+                <a:solidFill>
+                  <a:srgbClr val="4B5563"/>
+                </a:solidFill>
+                <a:latin typeface="Tahoma"/>
+                <a:ea typeface="Tahoma"/>
+                <a:cs typeface="B Nazanin" panose="00000400000000000000" pitchFamily="2" charset="-78"/>
               </a:rPr>
               <a:t>پرونده‌ها، فعالیت‌ها، زمان‌ها</a:t>
             </a:r>
           </a:p>
           <a:p>
-            <a:pPr rtl="1" algn="ctr">
+            <a:pPr algn="ctr" rtl="1">
               <a:lnSpc>
                 <a:spcPct val="100000"/>
               </a:lnSpc>
@@ -3711,13 +3873,13 @@
               </a:spcAft>
             </a:pPr>
             <a:r>
-              <a:rPr sz="750" b="0" i="0">
-                <a:solidFill>
-                  <a:srgbClr val="4B5563"/>
-                </a:solidFill>
-                <a:latin typeface="Tahoma"/>
-                <a:ea typeface="Tahoma"/>
-                <a:cs typeface="Tahoma"/>
+              <a:rPr sz="1050" b="0" i="0">
+                <a:solidFill>
+                  <a:srgbClr val="4B5563"/>
+                </a:solidFill>
+                <a:latin typeface="Tahoma"/>
+                <a:ea typeface="Tahoma"/>
+                <a:cs typeface="B Nazanin" panose="00000400000000000000" pitchFamily="2" charset="-78"/>
               </a:rPr>
               <a:t>شناسهٔ هر پرونده</a:t>
             </a:r>
@@ -3732,7 +3894,7 @@
         </p:nvSpPr>
         <p:spPr>
           <a:xfrm>
-            <a:off x="5506059" y="1115568"/>
+            <a:off x="6668875" y="1142999"/>
             <a:ext cx="2359837" cy="1069848"/>
           </a:xfrm>
           <a:prstGeom prst="roundRect">
@@ -3765,7 +3927,7 @@
           </a:fontRef>
         </p:style>
         <p:txBody>
-          <a:bodyPr rtlCol="0" anchor="ctr" wrap="square" lIns="64008" rIns="64008" tIns="27432" bIns="27432">
+          <a:bodyPr wrap="square" lIns="64008" tIns="27432" rIns="64008" bIns="27432" rtlCol="0" anchor="ctr">
             <a:noAutofit/>
           </a:bodyPr>
           <a:lstStyle/>
@@ -3782,19 +3944,19 @@
               </a:spcAft>
             </a:pPr>
             <a:r>
-              <a:rPr sz="950" b="1" i="0">
+              <a:rPr sz="1200" b="1" i="0">
                 <a:solidFill>
                   <a:srgbClr val="1F2A37"/>
                 </a:solidFill>
                 <a:latin typeface="Tahoma"/>
                 <a:ea typeface="Tahoma"/>
-                <a:cs typeface="Tahoma"/>
+                <a:cs typeface="B Nazanin" panose="00000400000000000000" pitchFamily="2" charset="-78"/>
               </a:rPr>
               <a:t>ساخت پیشوند</a:t>
             </a:r>
           </a:p>
           <a:p>
-            <a:pPr rtl="1" algn="ctr">
+            <a:pPr algn="ctr" rtl="1">
               <a:lnSpc>
                 <a:spcPct val="100000"/>
               </a:lnSpc>
@@ -3806,19 +3968,19 @@
               </a:spcAft>
             </a:pPr>
             <a:r>
-              <a:rPr sz="750" b="0" i="0">
-                <a:solidFill>
-                  <a:srgbClr val="4B5563"/>
-                </a:solidFill>
-                <a:latin typeface="Tahoma"/>
-                <a:ea typeface="Tahoma"/>
-                <a:cs typeface="Tahoma"/>
+              <a:rPr sz="1050" b="0" i="0">
+                <a:solidFill>
+                  <a:srgbClr val="4B5563"/>
+                </a:solidFill>
+                <a:latin typeface="Tahoma"/>
+                <a:ea typeface="Tahoma"/>
+                <a:cs typeface="B Nazanin" panose="00000400000000000000" pitchFamily="2" charset="-78"/>
               </a:rPr>
               <a:t>برش هر پرونده به پیشوند</a:t>
             </a:r>
           </a:p>
           <a:p>
-            <a:pPr rtl="1" algn="ctr">
+            <a:pPr algn="ctr" rtl="1">
               <a:lnSpc>
                 <a:spcPct val="100000"/>
               </a:lnSpc>
@@ -3830,13 +3992,13 @@
               </a:spcAft>
             </a:pPr>
             <a:r>
-              <a:rPr sz="750" b="0" i="0">
-                <a:solidFill>
-                  <a:srgbClr val="4B5563"/>
-                </a:solidFill>
-                <a:latin typeface="Tahoma"/>
-                <a:ea typeface="Tahoma"/>
-                <a:cs typeface="Tahoma"/>
+              <a:rPr sz="1050" b="0" i="0">
+                <a:solidFill>
+                  <a:srgbClr val="4B5563"/>
+                </a:solidFill>
+                <a:latin typeface="Tahoma"/>
+                <a:ea typeface="Tahoma"/>
+                <a:cs typeface="B Nazanin" panose="00000400000000000000" pitchFamily="2" charset="-78"/>
               </a:rPr>
               <a:t>کمترین طول پیشوند: ۲</a:t>
             </a:r>
@@ -3851,7 +4013,7 @@
         </p:nvSpPr>
         <p:spPr>
           <a:xfrm>
-            <a:off x="2945053" y="1115568"/>
+            <a:off x="4107869" y="1142999"/>
             <a:ext cx="2359837" cy="1069848"/>
           </a:xfrm>
           <a:prstGeom prst="roundRect">
@@ -3884,7 +4046,7 @@
           </a:fontRef>
         </p:style>
         <p:txBody>
-          <a:bodyPr rtlCol="0" anchor="ctr" wrap="square" lIns="64008" rIns="64008" tIns="27432" bIns="27432">
+          <a:bodyPr wrap="square" lIns="64008" tIns="27432" rIns="64008" bIns="27432" rtlCol="0" anchor="ctr">
             <a:noAutofit/>
           </a:bodyPr>
           <a:lstStyle/>
@@ -3901,19 +4063,71 @@
               </a:spcAft>
             </a:pPr>
             <a:r>
-              <a:rPr sz="950" b="1" i="0">
+              <a:rPr sz="1200" b="1" i="0" dirty="0" err="1">
                 <a:solidFill>
                   <a:srgbClr val="1F2A37"/>
                 </a:solidFill>
                 <a:latin typeface="Tahoma"/>
                 <a:ea typeface="Tahoma"/>
-                <a:cs typeface="Tahoma"/>
-              </a:rPr>
-              <a:t>آمار زمانی و موردی</a:t>
-            </a:r>
-          </a:p>
-          <a:p>
-            <a:pPr rtl="1" algn="ctr">
+                <a:cs typeface="B Nazanin" panose="00000400000000000000" pitchFamily="2" charset="-78"/>
+              </a:rPr>
+              <a:t>آمار</a:t>
+            </a:r>
+            <a:r>
+              <a:rPr sz="1200" b="1" i="0" dirty="0">
+                <a:solidFill>
+                  <a:srgbClr val="1F2A37"/>
+                </a:solidFill>
+                <a:latin typeface="Tahoma"/>
+                <a:ea typeface="Tahoma"/>
+                <a:cs typeface="B Nazanin" panose="00000400000000000000" pitchFamily="2" charset="-78"/>
+              </a:rPr>
+              <a:t> </a:t>
+            </a:r>
+            <a:r>
+              <a:rPr sz="1200" b="1" i="0" dirty="0" err="1">
+                <a:solidFill>
+                  <a:srgbClr val="1F2A37"/>
+                </a:solidFill>
+                <a:latin typeface="Tahoma"/>
+                <a:ea typeface="Tahoma"/>
+                <a:cs typeface="B Nazanin" panose="00000400000000000000" pitchFamily="2" charset="-78"/>
+              </a:rPr>
+              <a:t>زمانی</a:t>
+            </a:r>
+            <a:r>
+              <a:rPr sz="1200" b="1" i="0" dirty="0">
+                <a:solidFill>
+                  <a:srgbClr val="1F2A37"/>
+                </a:solidFill>
+                <a:latin typeface="Tahoma"/>
+                <a:ea typeface="Tahoma"/>
+                <a:cs typeface="B Nazanin" panose="00000400000000000000" pitchFamily="2" charset="-78"/>
+              </a:rPr>
+              <a:t> و </a:t>
+            </a:r>
+            <a:r>
+              <a:rPr sz="1200" b="1" i="0" dirty="0" err="1">
+                <a:solidFill>
+                  <a:srgbClr val="1F2A37"/>
+                </a:solidFill>
+                <a:latin typeface="Tahoma"/>
+                <a:ea typeface="Tahoma"/>
+                <a:cs typeface="B Nazanin" panose="00000400000000000000" pitchFamily="2" charset="-78"/>
+              </a:rPr>
+              <a:t>موردی</a:t>
+            </a:r>
+            <a:endParaRPr sz="1200" b="1" i="0" dirty="0">
+              <a:solidFill>
+                <a:srgbClr val="1F2A37"/>
+              </a:solidFill>
+              <a:latin typeface="Tahoma"/>
+              <a:ea typeface="Tahoma"/>
+              <a:cs typeface="B Nazanin" panose="00000400000000000000" pitchFamily="2" charset="-78"/>
+            </a:endParaRPr>
+          </a:p>
+          <a:p>
+            <a:pPr algn="ctr" rtl="1">
               <a:lnSpc>
                 <a:spcPct val="100000"/>
               </a:lnSpc>
@@ -3925,19 +4139,93 @@
               </a:spcAft>
             </a:pPr>
             <a:r>
-              <a:rPr sz="750" b="0" i="0">
-                <a:solidFill>
-                  <a:srgbClr val="4B5563"/>
-                </a:solidFill>
-                <a:latin typeface="Tahoma"/>
-                <a:ea typeface="Tahoma"/>
-                <a:cs typeface="Tahoma"/>
-              </a:rPr>
-              <a:t>زمان انتظار و مدت کل</a:t>
-            </a:r>
-          </a:p>
-          <a:p>
-            <a:pPr rtl="1" algn="ctr">
+              <a:rPr sz="1050" b="0" i="0" dirty="0" err="1">
+                <a:solidFill>
+                  <a:srgbClr val="4B5563"/>
+                </a:solidFill>
+                <a:latin typeface="Tahoma"/>
+                <a:ea typeface="Tahoma"/>
+                <a:cs typeface="B Nazanin" panose="00000400000000000000" pitchFamily="2" charset="-78"/>
+              </a:rPr>
+              <a:t>زمان</a:t>
+            </a:r>
+            <a:r>
+              <a:rPr sz="1050" b="0" i="0" dirty="0">
+                <a:solidFill>
+                  <a:srgbClr val="4B5563"/>
+                </a:solidFill>
+                <a:latin typeface="Tahoma"/>
+                <a:ea typeface="Tahoma"/>
+                <a:cs typeface="B Nazanin" panose="00000400000000000000" pitchFamily="2" charset="-78"/>
+              </a:rPr>
+              <a:t> </a:t>
+            </a:r>
+            <a:r>
+              <a:rPr sz="1050" b="0" i="0" dirty="0" err="1">
+                <a:solidFill>
+                  <a:srgbClr val="4B5563"/>
+                </a:solidFill>
+                <a:latin typeface="Tahoma"/>
+                <a:ea typeface="Tahoma"/>
+                <a:cs typeface="B Nazanin" panose="00000400000000000000" pitchFamily="2" charset="-78"/>
+              </a:rPr>
+              <a:t>انتظار</a:t>
+            </a:r>
+            <a:r>
+              <a:rPr sz="1050" b="0" i="0" dirty="0">
+                <a:solidFill>
+                  <a:srgbClr val="4B5563"/>
+                </a:solidFill>
+                <a:latin typeface="Tahoma"/>
+                <a:ea typeface="Tahoma"/>
+                <a:cs typeface="B Nazanin" panose="00000400000000000000" pitchFamily="2" charset="-78"/>
+              </a:rPr>
+              <a:t> و </a:t>
+            </a:r>
+            <a:r>
+              <a:rPr sz="1050" b="0" i="0" dirty="0" err="1">
+                <a:solidFill>
+                  <a:srgbClr val="4B5563"/>
+                </a:solidFill>
+                <a:latin typeface="Tahoma"/>
+                <a:ea typeface="Tahoma"/>
+                <a:cs typeface="B Nazanin" panose="00000400000000000000" pitchFamily="2" charset="-78"/>
+              </a:rPr>
+              <a:t>مدت</a:t>
+            </a:r>
+            <a:r>
+              <a:rPr sz="1050" b="0" i="0" dirty="0">
+                <a:solidFill>
+                  <a:srgbClr val="4B5563"/>
+                </a:solidFill>
+                <a:latin typeface="Tahoma"/>
+                <a:ea typeface="Tahoma"/>
+                <a:cs typeface="B Nazanin" panose="00000400000000000000" pitchFamily="2" charset="-78"/>
+              </a:rPr>
+              <a:t> </a:t>
+            </a:r>
+            <a:r>
+              <a:rPr sz="1050" b="0" i="0" dirty="0" err="1">
+                <a:solidFill>
+                  <a:srgbClr val="4B5563"/>
+                </a:solidFill>
+                <a:latin typeface="Tahoma"/>
+                <a:ea typeface="Tahoma"/>
+                <a:cs typeface="B Nazanin" panose="00000400000000000000" pitchFamily="2" charset="-78"/>
+              </a:rPr>
+              <a:t>کل</a:t>
+            </a:r>
+            <a:endParaRPr sz="1050" b="0" i="0" dirty="0">
+              <a:solidFill>
+                <a:srgbClr val="4B5563"/>
+              </a:solidFill>
+              <a:latin typeface="Tahoma"/>
+              <a:ea typeface="Tahoma"/>
+              <a:cs typeface="B Nazanin" panose="00000400000000000000" pitchFamily="2" charset="-78"/>
+            </a:endParaRPr>
+          </a:p>
+          <a:p>
+            <a:pPr algn="ctr" rtl="1">
               <a:lnSpc>
                 <a:spcPct val="100000"/>
               </a:lnSpc>
@@ -3949,16 +4237,90 @@
               </a:spcAft>
             </a:pPr>
             <a:r>
-              <a:rPr sz="750" b="0" i="0">
-                <a:solidFill>
-                  <a:srgbClr val="4B5563"/>
-                </a:solidFill>
-                <a:latin typeface="Tahoma"/>
-                <a:ea typeface="Tahoma"/>
-                <a:cs typeface="Tahoma"/>
-              </a:rPr>
-              <a:t>زمان باقی‌مانده و نشانهٔ گلوگاه</a:t>
-            </a:r>
+              <a:rPr sz="1050" b="0" i="0" dirty="0" err="1">
+                <a:solidFill>
+                  <a:srgbClr val="4B5563"/>
+                </a:solidFill>
+                <a:latin typeface="Tahoma"/>
+                <a:ea typeface="Tahoma"/>
+                <a:cs typeface="B Nazanin" panose="00000400000000000000" pitchFamily="2" charset="-78"/>
+              </a:rPr>
+              <a:t>زمان</a:t>
+            </a:r>
+            <a:r>
+              <a:rPr sz="1050" b="0" i="0" dirty="0">
+                <a:solidFill>
+                  <a:srgbClr val="4B5563"/>
+                </a:solidFill>
+                <a:latin typeface="Tahoma"/>
+                <a:ea typeface="Tahoma"/>
+                <a:cs typeface="B Nazanin" panose="00000400000000000000" pitchFamily="2" charset="-78"/>
+              </a:rPr>
+              <a:t> </a:t>
+            </a:r>
+            <a:r>
+              <a:rPr sz="1050" b="0" i="0" dirty="0" err="1">
+                <a:solidFill>
+                  <a:srgbClr val="4B5563"/>
+                </a:solidFill>
+                <a:latin typeface="Tahoma"/>
+                <a:ea typeface="Tahoma"/>
+                <a:cs typeface="B Nazanin" panose="00000400000000000000" pitchFamily="2" charset="-78"/>
+              </a:rPr>
+              <a:t>باقی‌مانده</a:t>
+            </a:r>
+            <a:r>
+              <a:rPr sz="1050" b="0" i="0" dirty="0">
+                <a:solidFill>
+                  <a:srgbClr val="4B5563"/>
+                </a:solidFill>
+                <a:latin typeface="Tahoma"/>
+                <a:ea typeface="Tahoma"/>
+                <a:cs typeface="B Nazanin" panose="00000400000000000000" pitchFamily="2" charset="-78"/>
+              </a:rPr>
+              <a:t> و </a:t>
+            </a:r>
+            <a:r>
+              <a:rPr sz="1050" b="0" i="0" dirty="0" err="1" smtClean="0">
+                <a:solidFill>
+                  <a:srgbClr val="4B5563"/>
+                </a:solidFill>
+                <a:latin typeface="Tahoma"/>
+                <a:ea typeface="Tahoma"/>
+                <a:cs typeface="B Nazanin" panose="00000400000000000000" pitchFamily="2" charset="-78"/>
+              </a:rPr>
+              <a:t>نشانه</a:t>
+            </a:r>
+            <a:r>
+              <a:rPr sz="1050" b="0" i="0" dirty="0" smtClean="0">
+                <a:solidFill>
+                  <a:srgbClr val="4B5563"/>
+                </a:solidFill>
+                <a:latin typeface="Tahoma"/>
+                <a:ea typeface="Tahoma"/>
+                <a:cs typeface="B Nazanin" panose="00000400000000000000" pitchFamily="2" charset="-78"/>
+              </a:rPr>
+              <a:t> </a:t>
+            </a:r>
+            <a:r>
+              <a:rPr sz="1050" b="0" i="0" dirty="0" err="1">
+                <a:solidFill>
+                  <a:srgbClr val="4B5563"/>
+                </a:solidFill>
+                <a:latin typeface="Tahoma"/>
+                <a:ea typeface="Tahoma"/>
+                <a:cs typeface="B Nazanin" panose="00000400000000000000" pitchFamily="2" charset="-78"/>
+              </a:rPr>
+              <a:t>گلوگاه</a:t>
+            </a:r>
+            <a:endParaRPr sz="1050" b="0" i="0" dirty="0">
+              <a:solidFill>
+                <a:srgbClr val="4B5563"/>
+              </a:solidFill>
+              <a:latin typeface="Tahoma"/>
+              <a:ea typeface="Tahoma"/>
+              <a:cs typeface="B Nazanin" panose="00000400000000000000" pitchFamily="2" charset="-78"/>
+            </a:endParaRPr>
           </a:p>
         </p:txBody>
       </p:sp>
@@ -3970,7 +4332,7 @@
         </p:nvSpPr>
         <p:spPr>
           <a:xfrm>
-            <a:off x="384047" y="1115568"/>
+            <a:off x="1546863" y="1142999"/>
             <a:ext cx="2359837" cy="1069848"/>
           </a:xfrm>
           <a:prstGeom prst="roundRect">
@@ -4003,7 +4365,7 @@
           </a:fontRef>
         </p:style>
         <p:txBody>
-          <a:bodyPr rtlCol="0" anchor="ctr" wrap="square" lIns="64008" rIns="64008" tIns="27432" bIns="27432">
+          <a:bodyPr wrap="square" lIns="64008" tIns="27432" rIns="64008" bIns="27432" rtlCol="0" anchor="ctr">
             <a:noAutofit/>
           </a:bodyPr>
           <a:lstStyle/>
@@ -4020,19 +4382,19 @@
               </a:spcAft>
             </a:pPr>
             <a:r>
-              <a:rPr sz="950" b="1" i="0">
+              <a:rPr sz="1200" b="1" i="0">
                 <a:solidFill>
                   <a:srgbClr val="1F2A37"/>
                 </a:solidFill>
                 <a:latin typeface="Tahoma"/>
                 <a:ea typeface="Tahoma"/>
-                <a:cs typeface="Tahoma"/>
+                <a:cs typeface="B Nazanin" panose="00000400000000000000" pitchFamily="2" charset="-78"/>
               </a:rPr>
               <a:t>اهداف پیش‌بینی</a:t>
             </a:r>
           </a:p>
           <a:p>
-            <a:pPr rtl="1" algn="ctr">
+            <a:pPr algn="ctr" rtl="1">
               <a:lnSpc>
                 <a:spcPct val="100000"/>
               </a:lnSpc>
@@ -4044,19 +4406,19 @@
               </a:spcAft>
             </a:pPr>
             <a:r>
-              <a:rPr sz="750" b="0" i="0">
-                <a:solidFill>
-                  <a:srgbClr val="4B5563"/>
-                </a:solidFill>
-                <a:latin typeface="Tahoma"/>
-                <a:ea typeface="Tahoma"/>
-                <a:cs typeface="Tahoma"/>
+              <a:rPr sz="1050" b="0" i="0">
+                <a:solidFill>
+                  <a:srgbClr val="4B5563"/>
+                </a:solidFill>
+                <a:latin typeface="Tahoma"/>
+                <a:ea typeface="Tahoma"/>
+                <a:cs typeface="B Nazanin" panose="00000400000000000000" pitchFamily="2" charset="-78"/>
               </a:rPr>
               <a:t>فعالیت بعدی و زمان باقی‌مانده</a:t>
             </a:r>
           </a:p>
           <a:p>
-            <a:pPr rtl="1" algn="ctr">
+            <a:pPr algn="ctr" rtl="1">
               <a:lnSpc>
                 <a:spcPct val="100000"/>
               </a:lnSpc>
@@ -4068,13 +4430,13 @@
               </a:spcAft>
             </a:pPr>
             <a:r>
-              <a:rPr sz="750" b="0" i="0">
-                <a:solidFill>
-                  <a:srgbClr val="4B5563"/>
-                </a:solidFill>
-                <a:latin typeface="Tahoma"/>
-                <a:ea typeface="Tahoma"/>
-                <a:cs typeface="Tahoma"/>
+              <a:rPr sz="1050" b="0" i="0">
+                <a:solidFill>
+                  <a:srgbClr val="4B5563"/>
+                </a:solidFill>
+                <a:latin typeface="Tahoma"/>
+                <a:ea typeface="Tahoma"/>
+                <a:cs typeface="B Nazanin" panose="00000400000000000000" pitchFamily="2" charset="-78"/>
               </a:rPr>
               <a:t>کاهش تأخیر و تشخیص گلوگاه</a:t>
             </a:r>
@@ -4089,7 +4451,7 @@
         </p:nvCxnSpPr>
         <p:spPr>
           <a:xfrm flipH="1">
-            <a:off x="7865897" y="1650492"/>
+            <a:off x="9028713" y="1677923"/>
             <a:ext cx="201168" cy="0"/>
           </a:xfrm>
           <a:prstGeom prst="line">
@@ -4125,7 +4487,7 @@
         </p:nvCxnSpPr>
         <p:spPr>
           <a:xfrm flipH="1">
-            <a:off x="5304891" y="1650492"/>
+            <a:off x="6467707" y="1677923"/>
             <a:ext cx="201168" cy="0"/>
           </a:xfrm>
           <a:prstGeom prst="line">
@@ -4161,7 +4523,7 @@
         </p:nvCxnSpPr>
         <p:spPr>
           <a:xfrm flipH="1">
-            <a:off x="2743885" y="1650492"/>
+            <a:off x="3906701" y="1677923"/>
             <a:ext cx="201168" cy="0"/>
           </a:xfrm>
           <a:prstGeom prst="line">
@@ -4197,7 +4559,7 @@
         </p:nvSpPr>
         <p:spPr>
           <a:xfrm>
-            <a:off x="5506059" y="2395728"/>
+            <a:off x="6668875" y="2423159"/>
             <a:ext cx="2359837" cy="1069848"/>
           </a:xfrm>
           <a:prstGeom prst="roundRect">
@@ -4230,7 +4592,7 @@
           </a:fontRef>
         </p:style>
         <p:txBody>
-          <a:bodyPr rtlCol="0" anchor="ctr" wrap="square" lIns="64008" rIns="64008" tIns="27432" bIns="27432">
+          <a:bodyPr wrap="square" lIns="64008" tIns="27432" rIns="64008" bIns="27432" rtlCol="0" anchor="ctr">
             <a:noAutofit/>
           </a:bodyPr>
           <a:lstStyle/>
@@ -4247,19 +4609,19 @@
               </a:spcAft>
             </a:pPr>
             <a:r>
-              <a:rPr sz="950" b="1" i="0">
+              <a:rPr sz="1200" b="1" i="0">
                 <a:solidFill>
                   <a:srgbClr val="1F2A37"/>
                 </a:solidFill>
                 <a:latin typeface="Tahoma"/>
                 <a:ea typeface="Tahoma"/>
-                <a:cs typeface="Tahoma"/>
+                <a:cs typeface="B Nazanin" panose="00000400000000000000" pitchFamily="2" charset="-78"/>
               </a:rPr>
               <a:t>ویژگی‌های ترتیبی و زمانی</a:t>
             </a:r>
           </a:p>
           <a:p>
-            <a:pPr rtl="1" algn="ctr">
+            <a:pPr algn="ctr" rtl="1">
               <a:lnSpc>
                 <a:spcPct val="100000"/>
               </a:lnSpc>
@@ -4271,19 +4633,19 @@
               </a:spcAft>
             </a:pPr>
             <a:r>
-              <a:rPr sz="750" b="0" i="0">
-                <a:solidFill>
-                  <a:srgbClr val="4B5563"/>
-                </a:solidFill>
-                <a:latin typeface="Tahoma"/>
-                <a:ea typeface="Tahoma"/>
-                <a:cs typeface="Tahoma"/>
+              <a:rPr sz="1050" b="0" i="0">
+                <a:solidFill>
+                  <a:srgbClr val="4B5563"/>
+                </a:solidFill>
+                <a:latin typeface="Tahoma"/>
+                <a:ea typeface="Tahoma"/>
+                <a:cs typeface="B Nazanin" panose="00000400000000000000" pitchFamily="2" charset="-78"/>
               </a:rPr>
               <a:t>فعالیت قبلی، موقعیت، فاصلهٔ زمانی</a:t>
             </a:r>
           </a:p>
           <a:p>
-            <a:pPr rtl="1" algn="ctr">
+            <a:pPr algn="ctr" rtl="1">
               <a:lnSpc>
                 <a:spcPct val="100000"/>
               </a:lnSpc>
@@ -4295,13 +4657,13 @@
               </a:spcAft>
             </a:pPr>
             <a:r>
-              <a:rPr sz="750" b="0" i="0">
-                <a:solidFill>
-                  <a:srgbClr val="4B5563"/>
-                </a:solidFill>
-                <a:latin typeface="Tahoma"/>
-                <a:ea typeface="Tahoma"/>
-                <a:cs typeface="Tahoma"/>
+              <a:rPr sz="1050" b="0" i="0">
+                <a:solidFill>
+                  <a:srgbClr val="4B5563"/>
+                </a:solidFill>
+                <a:latin typeface="Tahoma"/>
+                <a:ea typeface="Tahoma"/>
+                <a:cs typeface="B Nazanin" panose="00000400000000000000" pitchFamily="2" charset="-78"/>
               </a:rPr>
               <a:t>زمان تجمعی، نقش، فراوانی</a:t>
             </a:r>
@@ -4316,7 +4678,7 @@
         </p:nvSpPr>
         <p:spPr>
           <a:xfrm>
-            <a:off x="2945053" y="2395728"/>
+            <a:off x="4107869" y="2423159"/>
             <a:ext cx="2359837" cy="1069848"/>
           </a:xfrm>
           <a:prstGeom prst="roundRect">
@@ -4349,7 +4711,7 @@
           </a:fontRef>
         </p:style>
         <p:txBody>
-          <a:bodyPr rtlCol="0" anchor="ctr" wrap="square" lIns="64008" rIns="64008" tIns="27432" bIns="27432">
+          <a:bodyPr wrap="square" lIns="64008" tIns="27432" rIns="64008" bIns="27432" rtlCol="0" anchor="ctr">
             <a:noAutofit/>
           </a:bodyPr>
           <a:lstStyle/>
@@ -4366,19 +4728,19 @@
               </a:spcAft>
             </a:pPr>
             <a:r>
-              <a:rPr sz="950" b="1" i="0">
+              <a:rPr sz="1200" b="1" i="0">
                 <a:solidFill>
                   <a:srgbClr val="1F2A37"/>
                 </a:solidFill>
                 <a:latin typeface="Tahoma"/>
                 <a:ea typeface="Tahoma"/>
-                <a:cs typeface="Tahoma"/>
+                <a:cs typeface="B Nazanin" panose="00000400000000000000" pitchFamily="2" charset="-78"/>
               </a:rPr>
               <a:t>گراف پیشوند</a:t>
             </a:r>
           </a:p>
           <a:p>
-            <a:pPr rtl="1" algn="ctr">
+            <a:pPr algn="ctr" rtl="1">
               <a:lnSpc>
                 <a:spcPct val="100000"/>
               </a:lnSpc>
@@ -4390,19 +4752,19 @@
               </a:spcAft>
             </a:pPr>
             <a:r>
-              <a:rPr sz="750" b="0" i="0">
-                <a:solidFill>
-                  <a:srgbClr val="4B5563"/>
-                </a:solidFill>
-                <a:latin typeface="Tahoma"/>
-                <a:ea typeface="Tahoma"/>
-                <a:cs typeface="Tahoma"/>
+              <a:rPr sz="1050" b="0" i="0">
+                <a:solidFill>
+                  <a:srgbClr val="4B5563"/>
+                </a:solidFill>
+                <a:latin typeface="Tahoma"/>
+                <a:ea typeface="Tahoma"/>
+                <a:cs typeface="B Nazanin" panose="00000400000000000000" pitchFamily="2" charset="-78"/>
               </a:rPr>
               <a:t>گره‌ها: فعالیت + ویژگی زمان/موقعیت</a:t>
             </a:r>
           </a:p>
           <a:p>
-            <a:pPr rtl="1" algn="ctr">
+            <a:pPr algn="ctr" rtl="1">
               <a:lnSpc>
                 <a:spcPct val="100000"/>
               </a:lnSpc>
@@ -4414,13 +4776,13 @@
               </a:spcAft>
             </a:pPr>
             <a:r>
-              <a:rPr sz="750" b="0" i="0">
-                <a:solidFill>
-                  <a:srgbClr val="4B5563"/>
-                </a:solidFill>
-                <a:latin typeface="Tahoma"/>
-                <a:ea typeface="Tahoma"/>
-                <a:cs typeface="Tahoma"/>
+              <a:rPr sz="1050" b="0" i="0">
+                <a:solidFill>
+                  <a:srgbClr val="4B5563"/>
+                </a:solidFill>
+                <a:latin typeface="Tahoma"/>
+                <a:ea typeface="Tahoma"/>
+                <a:cs typeface="B Nazanin" panose="00000400000000000000" pitchFamily="2" charset="-78"/>
               </a:rPr>
               <a:t>یال‌ها: ترتیب و تکرار فعالیت‌ها</a:t>
             </a:r>
@@ -4435,7 +4797,7 @@
         </p:nvSpPr>
         <p:spPr>
           <a:xfrm>
-            <a:off x="384047" y="2395728"/>
+            <a:off x="1546863" y="2423159"/>
             <a:ext cx="2359837" cy="1069848"/>
           </a:xfrm>
           <a:prstGeom prst="roundRect">
@@ -4468,7 +4830,7 @@
           </a:fontRef>
         </p:style>
         <p:txBody>
-          <a:bodyPr rtlCol="0" anchor="ctr" wrap="square" lIns="64008" rIns="64008" tIns="27432" bIns="27432">
+          <a:bodyPr wrap="square" lIns="64008" tIns="27432" rIns="64008" bIns="27432" rtlCol="0" anchor="ctr">
             <a:noAutofit/>
           </a:bodyPr>
           <a:lstStyle/>
@@ -4485,19 +4847,19 @@
               </a:spcAft>
             </a:pPr>
             <a:r>
-              <a:rPr sz="950" b="1" i="0">
+              <a:rPr sz="1200" b="1" i="0">
                 <a:solidFill>
                   <a:srgbClr val="1F2A37"/>
                 </a:solidFill>
                 <a:latin typeface="Tahoma"/>
                 <a:ea typeface="Tahoma"/>
-                <a:cs typeface="Tahoma"/>
+                <a:cs typeface="B Nazanin" panose="00000400000000000000" pitchFamily="2" charset="-78"/>
               </a:rPr>
               <a:t>تنظیمات یادگیری</a:t>
             </a:r>
           </a:p>
           <a:p>
-            <a:pPr rtl="1" algn="ctr">
+            <a:pPr algn="ctr" rtl="1">
               <a:lnSpc>
                 <a:spcPct val="100000"/>
               </a:lnSpc>
@@ -4509,19 +4871,19 @@
               </a:spcAft>
             </a:pPr>
             <a:r>
-              <a:rPr sz="750" b="0" i="0">
-                <a:solidFill>
-                  <a:srgbClr val="4B5563"/>
-                </a:solidFill>
-                <a:latin typeface="Tahoma"/>
-                <a:ea typeface="Tahoma"/>
-                <a:cs typeface="Tahoma"/>
+              <a:rPr sz="1050" b="0" i="0">
+                <a:solidFill>
+                  <a:srgbClr val="4B5563"/>
+                </a:solidFill>
+                <a:latin typeface="Tahoma"/>
+                <a:ea typeface="Tahoma"/>
+                <a:cs typeface="B Nazanin" panose="00000400000000000000" pitchFamily="2" charset="-78"/>
               </a:rPr>
               <a:t>یادگیری چندوظیفه‌ای با نظارت</a:t>
             </a:r>
           </a:p>
           <a:p>
-            <a:pPr rtl="1" algn="ctr">
+            <a:pPr algn="ctr" rtl="1">
               <a:lnSpc>
                 <a:spcPct val="100000"/>
               </a:lnSpc>
@@ -4533,13 +4895,13 @@
               </a:spcAft>
             </a:pPr>
             <a:r>
-              <a:rPr sz="750" b="0" i="0">
-                <a:solidFill>
-                  <a:srgbClr val="4B5563"/>
-                </a:solidFill>
-                <a:latin typeface="Tahoma"/>
-                <a:ea typeface="Tahoma"/>
-                <a:cs typeface="Tahoma"/>
+              <a:rPr sz="1050" b="0" i="0">
+                <a:solidFill>
+                  <a:srgbClr val="4B5563"/>
+                </a:solidFill>
+                <a:latin typeface="Tahoma"/>
+                <a:ea typeface="Tahoma"/>
+                <a:cs typeface="B Nazanin" panose="00000400000000000000" pitchFamily="2" charset="-78"/>
               </a:rPr>
               <a:t>تقسیم داده بر اساس پرونده</a:t>
             </a:r>
@@ -4554,7 +4916,7 @@
         </p:nvCxnSpPr>
         <p:spPr>
           <a:xfrm>
-            <a:off x="6685978" y="2185415"/>
+            <a:off x="7848794" y="2212846"/>
             <a:ext cx="0" cy="210313"/>
           </a:xfrm>
           <a:prstGeom prst="line">
@@ -4590,7 +4952,7 @@
         </p:nvCxnSpPr>
         <p:spPr>
           <a:xfrm>
-            <a:off x="4124972" y="2185415"/>
+            <a:off x="5287788" y="2212846"/>
             <a:ext cx="0" cy="210313"/>
           </a:xfrm>
           <a:prstGeom prst="line">
@@ -4626,7 +4988,7 @@
         </p:nvCxnSpPr>
         <p:spPr>
           <a:xfrm>
-            <a:off x="1563966" y="2185415"/>
+            <a:off x="2726782" y="2212846"/>
             <a:ext cx="0" cy="210313"/>
           </a:xfrm>
           <a:prstGeom prst="line">
@@ -4662,7 +5024,7 @@
         </p:nvSpPr>
         <p:spPr>
           <a:xfrm>
-            <a:off x="2845155" y="3611880"/>
+            <a:off x="4007971" y="3639311"/>
             <a:ext cx="5120640" cy="475488"/>
           </a:xfrm>
           <a:prstGeom prst="roundRect">
@@ -4695,7 +5057,7 @@
           </a:fontRef>
         </p:style>
         <p:txBody>
-          <a:bodyPr rtlCol="0" anchor="ctr" wrap="square" lIns="64008" rIns="64008" tIns="27432" bIns="27432">
+          <a:bodyPr wrap="square" lIns="64008" tIns="27432" rIns="64008" bIns="27432" rtlCol="0" anchor="ctr">
             <a:noAutofit/>
           </a:bodyPr>
           <a:lstStyle/>
@@ -4712,19 +5074,19 @@
               </a:spcAft>
             </a:pPr>
             <a:r>
-              <a:rPr sz="950" b="1" i="0">
+              <a:rPr sz="1200" b="1" i="0">
                 <a:solidFill>
                   <a:srgbClr val="1F3864"/>
                 </a:solidFill>
                 <a:latin typeface="Tahoma"/>
                 <a:ea typeface="Tahoma"/>
-                <a:cs typeface="Tahoma"/>
+                <a:cs typeface="B Nazanin" panose="00000400000000000000" pitchFamily="2" charset="-78"/>
               </a:rPr>
               <a:t>بازنمایی ورودی مشترک</a:t>
             </a:r>
           </a:p>
           <a:p>
-            <a:pPr rtl="1" algn="ctr">
+            <a:pPr algn="ctr" rtl="1">
               <a:lnSpc>
                 <a:spcPct val="100000"/>
               </a:lnSpc>
@@ -4736,13 +5098,13 @@
               </a:spcAft>
             </a:pPr>
             <a:r>
-              <a:rPr sz="750" b="0" i="0">
-                <a:solidFill>
-                  <a:srgbClr val="4B5563"/>
-                </a:solidFill>
-                <a:latin typeface="Tahoma"/>
-                <a:ea typeface="Tahoma"/>
-                <a:cs typeface="Tahoma"/>
+              <a:rPr sz="1050" b="0" i="0">
+                <a:solidFill>
+                  <a:srgbClr val="4B5563"/>
+                </a:solidFill>
+                <a:latin typeface="Tahoma"/>
+                <a:ea typeface="Tahoma"/>
+                <a:cs typeface="B Nazanin" panose="00000400000000000000" pitchFamily="2" charset="-78"/>
               </a:rPr>
               <a:t>فعالیت + فعالیت قبلی + موقعیت • کدگذاری زمان، نقش و فراوانی</a:t>
             </a:r>
@@ -4757,7 +5119,7 @@
         </p:nvSpPr>
         <p:spPr>
           <a:xfrm>
-            <a:off x="7213396" y="4251960"/>
+            <a:off x="8376212" y="4279391"/>
             <a:ext cx="3213506" cy="841248"/>
           </a:xfrm>
           <a:prstGeom prst="roundRect">
@@ -4790,7 +5152,7 @@
           </a:fontRef>
         </p:style>
         <p:txBody>
-          <a:bodyPr rtlCol="0" anchor="ctr" wrap="square" lIns="64008" rIns="64008" tIns="27432" bIns="27432">
+          <a:bodyPr wrap="square" lIns="64008" tIns="27432" rIns="64008" bIns="27432" rtlCol="0" anchor="ctr">
             <a:noAutofit/>
           </a:bodyPr>
           <a:lstStyle/>
@@ -4807,19 +5169,60 @@
               </a:spcAft>
             </a:pPr>
             <a:r>
-              <a:rPr sz="950" b="1" i="0">
+              <a:rPr sz="1200" b="1" i="0" dirty="0" err="1">
                 <a:solidFill>
                   <a:srgbClr val="1F2A37"/>
                 </a:solidFill>
                 <a:latin typeface="Tahoma"/>
                 <a:ea typeface="Tahoma"/>
-                <a:cs typeface="Tahoma"/>
-              </a:rPr>
-              <a:t>جریان ۱ — Transformer</a:t>
-            </a:r>
-          </a:p>
-          <a:p>
-            <a:pPr rtl="1" algn="ctr">
+                <a:cs typeface="B Nazanin" panose="00000400000000000000" pitchFamily="2" charset="-78"/>
+              </a:rPr>
+              <a:t>جریان</a:t>
+            </a:r>
+            <a:r>
+              <a:rPr sz="1200" b="1" i="0" dirty="0">
+                <a:solidFill>
+                  <a:srgbClr val="1F2A37"/>
+                </a:solidFill>
+                <a:latin typeface="Tahoma"/>
+                <a:ea typeface="Tahoma"/>
+                <a:cs typeface="B Nazanin" panose="00000400000000000000" pitchFamily="2" charset="-78"/>
+              </a:rPr>
+              <a:t> </a:t>
+            </a:r>
+            <a:r>
+              <a:rPr lang="fa-IR" sz="1200" b="1" i="0" dirty="0" smtClean="0">
+                <a:solidFill>
+                  <a:srgbClr val="1F2A37"/>
+                </a:solidFill>
+                <a:latin typeface="Tahoma"/>
+                <a:ea typeface="Tahoma"/>
+                <a:cs typeface="B Nazanin" panose="00000400000000000000" pitchFamily="2" charset="-78"/>
+              </a:rPr>
+              <a:t>1 </a:t>
+            </a:r>
+            <a:r>
+              <a:rPr sz="1200" b="1" i="0" dirty="0" smtClean="0">
+                <a:solidFill>
+                  <a:srgbClr val="1F2A37"/>
+                </a:solidFill>
+                <a:latin typeface="Tahoma"/>
+                <a:ea typeface="Tahoma"/>
+                <a:cs typeface="B Nazanin" panose="00000400000000000000" pitchFamily="2" charset="-78"/>
+              </a:rPr>
+              <a:t>Transformer</a:t>
+            </a:r>
+            <a:endParaRPr sz="1200" b="1" i="0" dirty="0">
+              <a:solidFill>
+                <a:srgbClr val="1F2A37"/>
+              </a:solidFill>
+              <a:latin typeface="Tahoma"/>
+              <a:ea typeface="Tahoma"/>
+              <a:cs typeface="B Nazanin" panose="00000400000000000000" pitchFamily="2" charset="-78"/>
+            </a:endParaRPr>
+          </a:p>
+          <a:p>
+            <a:pPr algn="ctr" rtl="1">
               <a:lnSpc>
                 <a:spcPct val="100000"/>
               </a:lnSpc>
@@ -4831,19 +5234,49 @@
               </a:spcAft>
             </a:pPr>
             <a:r>
-              <a:rPr sz="750" b="0" i="0">
-                <a:solidFill>
-                  <a:srgbClr val="4B5563"/>
-                </a:solidFill>
-                <a:latin typeface="Tahoma"/>
-                <a:ea typeface="Tahoma"/>
-                <a:cs typeface="Tahoma"/>
-              </a:rPr>
-              <a:t>کدگذار علّی</a:t>
-            </a:r>
-          </a:p>
-          <a:p>
-            <a:pPr rtl="1" algn="ctr">
+              <a:rPr sz="1050" b="0" i="0" dirty="0" err="1">
+                <a:solidFill>
+                  <a:srgbClr val="4B5563"/>
+                </a:solidFill>
+                <a:latin typeface="Tahoma"/>
+                <a:ea typeface="Tahoma"/>
+                <a:cs typeface="B Nazanin" panose="00000400000000000000" pitchFamily="2" charset="-78"/>
+              </a:rPr>
+              <a:t>کدگذار</a:t>
+            </a:r>
+            <a:r>
+              <a:rPr sz="1050" b="0" i="0" dirty="0">
+                <a:solidFill>
+                  <a:srgbClr val="4B5563"/>
+                </a:solidFill>
+                <a:latin typeface="Tahoma"/>
+                <a:ea typeface="Tahoma"/>
+                <a:cs typeface="B Nazanin" panose="00000400000000000000" pitchFamily="2" charset="-78"/>
+              </a:rPr>
+              <a:t> </a:t>
+            </a:r>
+            <a:r>
+              <a:rPr sz="1050" b="0" i="0" dirty="0" err="1">
+                <a:solidFill>
+                  <a:srgbClr val="4B5563"/>
+                </a:solidFill>
+                <a:latin typeface="Tahoma"/>
+                <a:ea typeface="Tahoma"/>
+                <a:cs typeface="B Nazanin" panose="00000400000000000000" pitchFamily="2" charset="-78"/>
+              </a:rPr>
+              <a:t>علّی</a:t>
+            </a:r>
+            <a:endParaRPr sz="1050" b="0" i="0" dirty="0">
+              <a:solidFill>
+                <a:srgbClr val="4B5563"/>
+              </a:solidFill>
+              <a:latin typeface="Tahoma"/>
+              <a:ea typeface="Tahoma"/>
+              <a:cs typeface="B Nazanin" panose="00000400000000000000" pitchFamily="2" charset="-78"/>
+            </a:endParaRPr>
+          </a:p>
+          <a:p>
+            <a:pPr algn="ctr" rtl="1">
               <a:lnSpc>
                 <a:spcPct val="100000"/>
               </a:lnSpc>
@@ -4855,16 +5288,46 @@
               </a:spcAft>
             </a:pPr>
             <a:r>
-              <a:rPr sz="750" b="0" i="0">
-                <a:solidFill>
-                  <a:srgbClr val="4B5563"/>
-                </a:solidFill>
-                <a:latin typeface="Tahoma"/>
-                <a:ea typeface="Tahoma"/>
-                <a:cs typeface="Tahoma"/>
-              </a:rPr>
-              <a:t>وابستگی‌های دوربرد</a:t>
-            </a:r>
+              <a:rPr sz="1050" b="0" i="0" dirty="0" err="1">
+                <a:solidFill>
+                  <a:srgbClr val="4B5563"/>
+                </a:solidFill>
+                <a:latin typeface="Tahoma"/>
+                <a:ea typeface="Tahoma"/>
+                <a:cs typeface="B Nazanin" panose="00000400000000000000" pitchFamily="2" charset="-78"/>
+              </a:rPr>
+              <a:t>وابستگی‌های</a:t>
+            </a:r>
+            <a:r>
+              <a:rPr sz="1050" b="0" i="0" dirty="0">
+                <a:solidFill>
+                  <a:srgbClr val="4B5563"/>
+                </a:solidFill>
+                <a:latin typeface="Tahoma"/>
+                <a:ea typeface="Tahoma"/>
+                <a:cs typeface="B Nazanin" panose="00000400000000000000" pitchFamily="2" charset="-78"/>
+              </a:rPr>
+              <a:t> </a:t>
+            </a:r>
+            <a:r>
+              <a:rPr sz="1050" b="0" i="0" dirty="0" err="1">
+                <a:solidFill>
+                  <a:srgbClr val="4B5563"/>
+                </a:solidFill>
+                <a:latin typeface="Tahoma"/>
+                <a:ea typeface="Tahoma"/>
+                <a:cs typeface="B Nazanin" panose="00000400000000000000" pitchFamily="2" charset="-78"/>
+              </a:rPr>
+              <a:t>دوربرد</a:t>
+            </a:r>
+            <a:endParaRPr sz="1050" b="0" i="0" dirty="0">
+              <a:solidFill>
+                <a:srgbClr val="4B5563"/>
+              </a:solidFill>
+              <a:latin typeface="Tahoma"/>
+              <a:ea typeface="Tahoma"/>
+              <a:cs typeface="B Nazanin" panose="00000400000000000000" pitchFamily="2" charset="-78"/>
+            </a:endParaRPr>
           </a:p>
         </p:txBody>
       </p:sp>
@@ -4876,7 +5339,7 @@
         </p:nvSpPr>
         <p:spPr>
           <a:xfrm>
-            <a:off x="3798722" y="4251960"/>
+            <a:off x="4961538" y="4279391"/>
             <a:ext cx="3213506" cy="841248"/>
           </a:xfrm>
           <a:prstGeom prst="roundRect">
@@ -4909,7 +5372,7 @@
           </a:fontRef>
         </p:style>
         <p:txBody>
-          <a:bodyPr rtlCol="0" anchor="ctr" wrap="square" lIns="64008" rIns="64008" tIns="27432" bIns="27432">
+          <a:bodyPr wrap="square" lIns="64008" tIns="27432" rIns="64008" bIns="27432" rtlCol="0" anchor="ctr">
             <a:noAutofit/>
           </a:bodyPr>
           <a:lstStyle/>
@@ -4926,19 +5389,60 @@
               </a:spcAft>
             </a:pPr>
             <a:r>
-              <a:rPr sz="950" b="1" i="0">
+              <a:rPr sz="1200" b="1" i="0" dirty="0" err="1">
                 <a:solidFill>
                   <a:srgbClr val="1F2A37"/>
                 </a:solidFill>
                 <a:latin typeface="Tahoma"/>
                 <a:ea typeface="Tahoma"/>
-                <a:cs typeface="Tahoma"/>
-              </a:rPr>
-              <a:t>جریان ۲ — TCN</a:t>
-            </a:r>
-          </a:p>
-          <a:p>
-            <a:pPr rtl="1" algn="ctr">
+                <a:cs typeface="B Nazanin" panose="00000400000000000000" pitchFamily="2" charset="-78"/>
+              </a:rPr>
+              <a:t>جریان</a:t>
+            </a:r>
+            <a:r>
+              <a:rPr sz="1200" b="1" i="0" dirty="0">
+                <a:solidFill>
+                  <a:srgbClr val="1F2A37"/>
+                </a:solidFill>
+                <a:latin typeface="Tahoma"/>
+                <a:ea typeface="Tahoma"/>
+                <a:cs typeface="B Nazanin" panose="00000400000000000000" pitchFamily="2" charset="-78"/>
+              </a:rPr>
+              <a:t> ۲ </a:t>
+            </a:r>
+            <a:r>
+              <a:rPr lang="fa-IR" sz="1200" b="1" i="0" dirty="0" smtClean="0">
+                <a:solidFill>
+                  <a:srgbClr val="1F2A37"/>
+                </a:solidFill>
+                <a:latin typeface="Tahoma"/>
+                <a:ea typeface="Tahoma"/>
+                <a:cs typeface="B Nazanin" panose="00000400000000000000" pitchFamily="2" charset="-78"/>
+              </a:rPr>
+              <a:t> </a:t>
+            </a:r>
+            <a:r>
+              <a:rPr sz="1200" b="1" i="0" dirty="0" smtClean="0">
+                <a:solidFill>
+                  <a:srgbClr val="1F2A37"/>
+                </a:solidFill>
+                <a:latin typeface="Tahoma"/>
+                <a:ea typeface="Tahoma"/>
+                <a:cs typeface="B Nazanin" panose="00000400000000000000" pitchFamily="2" charset="-78"/>
+              </a:rPr>
+              <a:t>TCN</a:t>
+            </a:r>
+            <a:endParaRPr sz="1200" b="1" i="0" dirty="0">
+              <a:solidFill>
+                <a:srgbClr val="1F2A37"/>
+              </a:solidFill>
+              <a:latin typeface="Tahoma"/>
+              <a:ea typeface="Tahoma"/>
+              <a:cs typeface="B Nazanin" panose="00000400000000000000" pitchFamily="2" charset="-78"/>
+            </a:endParaRPr>
+          </a:p>
+          <a:p>
+            <a:pPr algn="ctr" rtl="1">
               <a:lnSpc>
                 <a:spcPct val="100000"/>
               </a:lnSpc>
@@ -4950,19 +5454,49 @@
               </a:spcAft>
             </a:pPr>
             <a:r>
-              <a:rPr sz="750" b="0" i="0">
-                <a:solidFill>
-                  <a:srgbClr val="4B5563"/>
-                </a:solidFill>
-                <a:latin typeface="Tahoma"/>
-                <a:ea typeface="Tahoma"/>
-                <a:cs typeface="Tahoma"/>
-              </a:rPr>
-              <a:t>پیچش زمانی</a:t>
-            </a:r>
-          </a:p>
-          <a:p>
-            <a:pPr rtl="1" algn="ctr">
+              <a:rPr sz="1050" b="0" i="0" dirty="0" err="1">
+                <a:solidFill>
+                  <a:srgbClr val="4B5563"/>
+                </a:solidFill>
+                <a:latin typeface="Tahoma"/>
+                <a:ea typeface="Tahoma"/>
+                <a:cs typeface="B Nazanin" panose="00000400000000000000" pitchFamily="2" charset="-78"/>
+              </a:rPr>
+              <a:t>پیچش</a:t>
+            </a:r>
+            <a:r>
+              <a:rPr sz="1050" b="0" i="0" dirty="0">
+                <a:solidFill>
+                  <a:srgbClr val="4B5563"/>
+                </a:solidFill>
+                <a:latin typeface="Tahoma"/>
+                <a:ea typeface="Tahoma"/>
+                <a:cs typeface="B Nazanin" panose="00000400000000000000" pitchFamily="2" charset="-78"/>
+              </a:rPr>
+              <a:t> </a:t>
+            </a:r>
+            <a:r>
+              <a:rPr sz="1050" b="0" i="0" dirty="0" err="1">
+                <a:solidFill>
+                  <a:srgbClr val="4B5563"/>
+                </a:solidFill>
+                <a:latin typeface="Tahoma"/>
+                <a:ea typeface="Tahoma"/>
+                <a:cs typeface="B Nazanin" panose="00000400000000000000" pitchFamily="2" charset="-78"/>
+              </a:rPr>
+              <a:t>زمانی</a:t>
+            </a:r>
+            <a:endParaRPr sz="1050" b="0" i="0" dirty="0">
+              <a:solidFill>
+                <a:srgbClr val="4B5563"/>
+              </a:solidFill>
+              <a:latin typeface="Tahoma"/>
+              <a:ea typeface="Tahoma"/>
+              <a:cs typeface="B Nazanin" panose="00000400000000000000" pitchFamily="2" charset="-78"/>
+            </a:endParaRPr>
+          </a:p>
+          <a:p>
+            <a:pPr algn="ctr" rtl="1">
               <a:lnSpc>
                 <a:spcPct val="100000"/>
               </a:lnSpc>
@@ -4974,16 +5508,68 @@
               </a:spcAft>
             </a:pPr>
             <a:r>
-              <a:rPr sz="750" b="0" i="0">
-                <a:solidFill>
-                  <a:srgbClr val="4B5563"/>
-                </a:solidFill>
-                <a:latin typeface="Tahoma"/>
-                <a:ea typeface="Tahoma"/>
-                <a:cs typeface="Tahoma"/>
-              </a:rPr>
-              <a:t>الگوهای محلی چندمقیاسی</a:t>
-            </a:r>
+              <a:rPr sz="1050" b="0" i="0" dirty="0" err="1">
+                <a:solidFill>
+                  <a:srgbClr val="4B5563"/>
+                </a:solidFill>
+                <a:latin typeface="Tahoma"/>
+                <a:ea typeface="Tahoma"/>
+                <a:cs typeface="B Nazanin" panose="00000400000000000000" pitchFamily="2" charset="-78"/>
+              </a:rPr>
+              <a:t>الگوهای</a:t>
+            </a:r>
+            <a:r>
+              <a:rPr sz="1050" b="0" i="0" dirty="0">
+                <a:solidFill>
+                  <a:srgbClr val="4B5563"/>
+                </a:solidFill>
+                <a:latin typeface="Tahoma"/>
+                <a:ea typeface="Tahoma"/>
+                <a:cs typeface="B Nazanin" panose="00000400000000000000" pitchFamily="2" charset="-78"/>
+              </a:rPr>
+              <a:t> </a:t>
+            </a:r>
+            <a:r>
+              <a:rPr sz="1050" b="0" i="0" dirty="0" err="1">
+                <a:solidFill>
+                  <a:srgbClr val="4B5563"/>
+                </a:solidFill>
+                <a:latin typeface="Tahoma"/>
+                <a:ea typeface="Tahoma"/>
+                <a:cs typeface="B Nazanin" panose="00000400000000000000" pitchFamily="2" charset="-78"/>
+              </a:rPr>
+              <a:t>محلی</a:t>
+            </a:r>
+            <a:r>
+              <a:rPr sz="1050" b="0" i="0" dirty="0">
+                <a:solidFill>
+                  <a:srgbClr val="4B5563"/>
+                </a:solidFill>
+                <a:latin typeface="Tahoma"/>
+                <a:ea typeface="Tahoma"/>
+                <a:cs typeface="B Nazanin" panose="00000400000000000000" pitchFamily="2" charset="-78"/>
+              </a:rPr>
+              <a:t> </a:t>
+            </a:r>
+            <a:r>
+              <a:rPr sz="1050" b="0" i="0" dirty="0" err="1">
+                <a:solidFill>
+                  <a:srgbClr val="4B5563"/>
+                </a:solidFill>
+                <a:latin typeface="Tahoma"/>
+                <a:ea typeface="Tahoma"/>
+                <a:cs typeface="B Nazanin" panose="00000400000000000000" pitchFamily="2" charset="-78"/>
+              </a:rPr>
+              <a:t>چندمقیاسی</a:t>
+            </a:r>
+            <a:endParaRPr sz="1050" b="0" i="0" dirty="0">
+              <a:solidFill>
+                <a:srgbClr val="4B5563"/>
+              </a:solidFill>
+              <a:latin typeface="Tahoma"/>
+              <a:ea typeface="Tahoma"/>
+              <a:cs typeface="B Nazanin" panose="00000400000000000000" pitchFamily="2" charset="-78"/>
+            </a:endParaRPr>
           </a:p>
         </p:txBody>
       </p:sp>
@@ -4995,7 +5581,7 @@
         </p:nvSpPr>
         <p:spPr>
           <a:xfrm>
-            <a:off x="384047" y="4251960"/>
+            <a:off x="1546863" y="4279391"/>
             <a:ext cx="3213506" cy="841248"/>
           </a:xfrm>
           <a:prstGeom prst="roundRect">
@@ -5028,7 +5614,7 @@
           </a:fontRef>
         </p:style>
         <p:txBody>
-          <a:bodyPr rtlCol="0" anchor="ctr" wrap="square" lIns="64008" rIns="64008" tIns="27432" bIns="27432">
+          <a:bodyPr wrap="square" lIns="64008" tIns="27432" rIns="64008" bIns="27432" rtlCol="0" anchor="ctr">
             <a:noAutofit/>
           </a:bodyPr>
           <a:lstStyle/>
@@ -5045,19 +5631,104 @@
               </a:spcAft>
             </a:pPr>
             <a:r>
-              <a:rPr sz="950" b="1" i="0">
+              <a:rPr sz="1200" b="1" i="0" dirty="0" err="1">
                 <a:solidFill>
                   <a:srgbClr val="1F2A37"/>
                 </a:solidFill>
                 <a:latin typeface="Tahoma"/>
                 <a:ea typeface="Tahoma"/>
-                <a:cs typeface="Tahoma"/>
-              </a:rPr>
-              <a:t>جریان ۳ — GNN گراف پیشوند</a:t>
-            </a:r>
-          </a:p>
-          <a:p>
-            <a:pPr rtl="1" algn="ctr">
+                <a:cs typeface="B Nazanin" panose="00000400000000000000" pitchFamily="2" charset="-78"/>
+              </a:rPr>
+              <a:t>جریان</a:t>
+            </a:r>
+            <a:r>
+              <a:rPr sz="1200" b="1" i="0" dirty="0">
+                <a:solidFill>
+                  <a:srgbClr val="1F2A37"/>
+                </a:solidFill>
+                <a:latin typeface="Tahoma"/>
+                <a:ea typeface="Tahoma"/>
+                <a:cs typeface="B Nazanin" panose="00000400000000000000" pitchFamily="2" charset="-78"/>
+              </a:rPr>
+              <a:t> ۳ </a:t>
+            </a:r>
+            <a:r>
+              <a:rPr lang="fa-IR" sz="1200" b="1" i="0" dirty="0" smtClean="0">
+                <a:solidFill>
+                  <a:srgbClr val="1F2A37"/>
+                </a:solidFill>
+                <a:latin typeface="Tahoma"/>
+                <a:ea typeface="Tahoma"/>
+                <a:cs typeface="B Nazanin" panose="00000400000000000000" pitchFamily="2" charset="-78"/>
+              </a:rPr>
+              <a:t> </a:t>
+            </a:r>
+            <a:r>
+              <a:rPr sz="1200" b="1" i="0" dirty="0" smtClean="0">
+                <a:solidFill>
+                  <a:srgbClr val="1F2A37"/>
+                </a:solidFill>
+                <a:latin typeface="Tahoma"/>
+                <a:ea typeface="Tahoma"/>
+                <a:cs typeface="B Nazanin" panose="00000400000000000000" pitchFamily="2" charset="-78"/>
+              </a:rPr>
+              <a:t>GNN </a:t>
+            </a:r>
+            <a:r>
+              <a:rPr lang="fa-IR" sz="1200" b="1" i="0" dirty="0" smtClean="0">
+                <a:solidFill>
+                  <a:srgbClr val="1F2A37"/>
+                </a:solidFill>
+                <a:latin typeface="Tahoma"/>
+                <a:ea typeface="Tahoma"/>
+                <a:cs typeface="B Nazanin" panose="00000400000000000000" pitchFamily="2" charset="-78"/>
+              </a:rPr>
+              <a:t> </a:t>
+            </a:r>
+            <a:r>
+              <a:rPr sz="1200" b="1" i="0" dirty="0" err="1" smtClean="0">
+                <a:solidFill>
+                  <a:srgbClr val="1F2A37"/>
+                </a:solidFill>
+                <a:latin typeface="Tahoma"/>
+                <a:ea typeface="Tahoma"/>
+                <a:cs typeface="B Nazanin" panose="00000400000000000000" pitchFamily="2" charset="-78"/>
+              </a:rPr>
+              <a:t>گراف</a:t>
+            </a:r>
+            <a:r>
+              <a:rPr sz="1200" b="1" i="0" dirty="0" smtClean="0">
+                <a:solidFill>
+                  <a:srgbClr val="1F2A37"/>
+                </a:solidFill>
+                <a:latin typeface="Tahoma"/>
+                <a:ea typeface="Tahoma"/>
+                <a:cs typeface="B Nazanin" panose="00000400000000000000" pitchFamily="2" charset="-78"/>
+              </a:rPr>
+              <a:t> </a:t>
+            </a:r>
+            <a:r>
+              <a:rPr sz="1200" b="1" i="0" dirty="0" err="1">
+                <a:solidFill>
+                  <a:srgbClr val="1F2A37"/>
+                </a:solidFill>
+                <a:latin typeface="Tahoma"/>
+                <a:ea typeface="Tahoma"/>
+                <a:cs typeface="B Nazanin" panose="00000400000000000000" pitchFamily="2" charset="-78"/>
+              </a:rPr>
+              <a:t>پیشوند</a:t>
+            </a:r>
+            <a:endParaRPr sz="1200" b="1" i="0" dirty="0">
+              <a:solidFill>
+                <a:srgbClr val="1F2A37"/>
+              </a:solidFill>
+              <a:latin typeface="Tahoma"/>
+              <a:ea typeface="Tahoma"/>
+              <a:cs typeface="B Nazanin" panose="00000400000000000000" pitchFamily="2" charset="-78"/>
+            </a:endParaRPr>
+          </a:p>
+          <a:p>
+            <a:pPr algn="ctr" rtl="1">
               <a:lnSpc>
                 <a:spcPct val="100000"/>
               </a:lnSpc>
@@ -5069,19 +5740,71 @@
               </a:spcAft>
             </a:pPr>
             <a:r>
-              <a:rPr sz="750" b="0" i="0">
-                <a:solidFill>
-                  <a:srgbClr val="4B5563"/>
-                </a:solidFill>
-                <a:latin typeface="Tahoma"/>
-                <a:ea typeface="Tahoma"/>
-                <a:cs typeface="Tahoma"/>
-              </a:rPr>
-              <a:t>شبکهٔ عصبی گراف</a:t>
-            </a:r>
-          </a:p>
-          <a:p>
-            <a:pPr rtl="1" algn="ctr">
+              <a:rPr sz="1050" b="0" i="0" dirty="0" err="1" smtClean="0">
+                <a:solidFill>
+                  <a:srgbClr val="4B5563"/>
+                </a:solidFill>
+                <a:latin typeface="Tahoma"/>
+                <a:ea typeface="Tahoma"/>
+                <a:cs typeface="B Nazanin" panose="00000400000000000000" pitchFamily="2" charset="-78"/>
+              </a:rPr>
+              <a:t>شبکه</a:t>
+            </a:r>
+            <a:r>
+              <a:rPr sz="1050" b="0" i="0" dirty="0" smtClean="0">
+                <a:solidFill>
+                  <a:srgbClr val="4B5563"/>
+                </a:solidFill>
+                <a:latin typeface="Tahoma"/>
+                <a:ea typeface="Tahoma"/>
+                <a:cs typeface="B Nazanin" panose="00000400000000000000" pitchFamily="2" charset="-78"/>
+              </a:rPr>
+              <a:t> </a:t>
+            </a:r>
+            <a:r>
+              <a:rPr sz="1050" b="0" i="0" dirty="0" err="1">
+                <a:solidFill>
+                  <a:srgbClr val="4B5563"/>
+                </a:solidFill>
+                <a:latin typeface="Tahoma"/>
+                <a:ea typeface="Tahoma"/>
+                <a:cs typeface="B Nazanin" panose="00000400000000000000" pitchFamily="2" charset="-78"/>
+              </a:rPr>
+              <a:t>عصبی</a:t>
+            </a:r>
+            <a:r>
+              <a:rPr sz="1050" b="0" i="0" dirty="0">
+                <a:solidFill>
+                  <a:srgbClr val="4B5563"/>
+                </a:solidFill>
+                <a:latin typeface="Tahoma"/>
+                <a:ea typeface="Tahoma"/>
+                <a:cs typeface="B Nazanin" panose="00000400000000000000" pitchFamily="2" charset="-78"/>
+              </a:rPr>
+              <a:t> </a:t>
+            </a:r>
+            <a:r>
+              <a:rPr sz="1050" b="0" i="0" dirty="0" err="1">
+                <a:solidFill>
+                  <a:srgbClr val="4B5563"/>
+                </a:solidFill>
+                <a:latin typeface="Tahoma"/>
+                <a:ea typeface="Tahoma"/>
+                <a:cs typeface="B Nazanin" panose="00000400000000000000" pitchFamily="2" charset="-78"/>
+              </a:rPr>
+              <a:t>گراف</a:t>
+            </a:r>
+            <a:endParaRPr sz="1050" b="0" i="0" dirty="0">
+              <a:solidFill>
+                <a:srgbClr val="4B5563"/>
+              </a:solidFill>
+              <a:latin typeface="Tahoma"/>
+              <a:ea typeface="Tahoma"/>
+              <a:cs typeface="B Nazanin" panose="00000400000000000000" pitchFamily="2" charset="-78"/>
+            </a:endParaRPr>
+          </a:p>
+          <a:p>
+            <a:pPr algn="ctr" rtl="1">
               <a:lnSpc>
                 <a:spcPct val="100000"/>
               </a:lnSpc>
@@ -5093,55 +5816,93 @@
               </a:spcAft>
             </a:pPr>
             <a:r>
-              <a:rPr sz="750" b="0" i="0">
-                <a:solidFill>
-                  <a:srgbClr val="4B5563"/>
-                </a:solidFill>
-                <a:latin typeface="Tahoma"/>
-                <a:ea typeface="Tahoma"/>
-                <a:cs typeface="Tahoma"/>
-              </a:rPr>
-              <a:t>روابط میان فعالیت‌های پیشوند</a:t>
-            </a:r>
+              <a:rPr sz="1050" b="0" i="0" dirty="0" err="1">
+                <a:solidFill>
+                  <a:srgbClr val="4B5563"/>
+                </a:solidFill>
+                <a:latin typeface="Tahoma"/>
+                <a:ea typeface="Tahoma"/>
+                <a:cs typeface="B Nazanin" panose="00000400000000000000" pitchFamily="2" charset="-78"/>
+              </a:rPr>
+              <a:t>روابط</a:t>
+            </a:r>
+            <a:r>
+              <a:rPr sz="1050" b="0" i="0" dirty="0">
+                <a:solidFill>
+                  <a:srgbClr val="4B5563"/>
+                </a:solidFill>
+                <a:latin typeface="Tahoma"/>
+                <a:ea typeface="Tahoma"/>
+                <a:cs typeface="B Nazanin" panose="00000400000000000000" pitchFamily="2" charset="-78"/>
+              </a:rPr>
+              <a:t> </a:t>
+            </a:r>
+            <a:r>
+              <a:rPr sz="1050" b="0" i="0" dirty="0" err="1">
+                <a:solidFill>
+                  <a:srgbClr val="4B5563"/>
+                </a:solidFill>
+                <a:latin typeface="Tahoma"/>
+                <a:ea typeface="Tahoma"/>
+                <a:cs typeface="B Nazanin" panose="00000400000000000000" pitchFamily="2" charset="-78"/>
+              </a:rPr>
+              <a:t>میان</a:t>
+            </a:r>
+            <a:r>
+              <a:rPr sz="1050" b="0" i="0" dirty="0">
+                <a:solidFill>
+                  <a:srgbClr val="4B5563"/>
+                </a:solidFill>
+                <a:latin typeface="Tahoma"/>
+                <a:ea typeface="Tahoma"/>
+                <a:cs typeface="B Nazanin" panose="00000400000000000000" pitchFamily="2" charset="-78"/>
+              </a:rPr>
+              <a:t> </a:t>
+            </a:r>
+            <a:r>
+              <a:rPr sz="1050" b="0" i="0" dirty="0" err="1">
+                <a:solidFill>
+                  <a:srgbClr val="4B5563"/>
+                </a:solidFill>
+                <a:latin typeface="Tahoma"/>
+                <a:ea typeface="Tahoma"/>
+                <a:cs typeface="B Nazanin" panose="00000400000000000000" pitchFamily="2" charset="-78"/>
+              </a:rPr>
+              <a:t>فعالیت‌های</a:t>
+            </a:r>
+            <a:r>
+              <a:rPr sz="1050" b="0" i="0" dirty="0">
+                <a:solidFill>
+                  <a:srgbClr val="4B5563"/>
+                </a:solidFill>
+                <a:latin typeface="Tahoma"/>
+                <a:ea typeface="Tahoma"/>
+                <a:cs typeface="B Nazanin" panose="00000400000000000000" pitchFamily="2" charset="-78"/>
+              </a:rPr>
+              <a:t> </a:t>
+            </a:r>
+            <a:r>
+              <a:rPr sz="1050" b="0" i="0" dirty="0" err="1">
+                <a:solidFill>
+                  <a:srgbClr val="4B5563"/>
+                </a:solidFill>
+                <a:latin typeface="Tahoma"/>
+                <a:ea typeface="Tahoma"/>
+                <a:cs typeface="B Nazanin" panose="00000400000000000000" pitchFamily="2" charset="-78"/>
+              </a:rPr>
+              <a:t>پیشوند</a:t>
+            </a:r>
+            <a:endParaRPr sz="1050" b="0" i="0" dirty="0">
+              <a:solidFill>
+                <a:srgbClr val="4B5563"/>
+              </a:solidFill>
+              <a:latin typeface="Tahoma"/>
+              <a:ea typeface="Tahoma"/>
+              <a:cs typeface="B Nazanin" panose="00000400000000000000" pitchFamily="2" charset="-78"/>
+            </a:endParaRPr>
           </a:p>
         </p:txBody>
       </p:sp>
-      <p:cxnSp>
-        <p:nvCxnSpPr>
-          <p:cNvPr id="26" name="p2_fan"/>
-          <p:cNvCxnSpPr/>
-          <p:nvPr/>
-        </p:nvCxnSpPr>
-        <p:spPr>
-          <a:xfrm>
-            <a:off x="6400800" y="4087368"/>
-            <a:ext cx="2419350" cy="164592"/>
-          </a:xfrm>
-          <a:prstGeom prst="line">
-            <a:avLst/>
-          </a:prstGeom>
-          <a:ln w="17780">
-            <a:solidFill>
-              <a:srgbClr val="2E4A7A"/>
-            </a:solidFill>
-            <a:tailEnd type="triangle" w="sm" len="med"/>
-          </a:ln>
-        </p:spPr>
-        <p:style>
-          <a:lnRef idx="2">
-            <a:schemeClr val="accent1"/>
-          </a:lnRef>
-          <a:fillRef idx="0">
-            <a:schemeClr val="accent1"/>
-          </a:fillRef>
-          <a:effectRef idx="1">
-            <a:schemeClr val="accent1"/>
-          </a:effectRef>
-          <a:fontRef idx="minor">
-            <a:schemeClr val="tx1"/>
-          </a:fontRef>
-        </p:style>
-      </p:cxnSp>
       <p:cxnSp>
         <p:nvCxnSpPr>
           <p:cNvPr id="27" name="p2_fan"/>
@@ -5150,7 +5911,7 @@
         </p:nvCxnSpPr>
         <p:spPr>
           <a:xfrm>
-            <a:off x="5405475" y="4087368"/>
+            <a:off x="6568291" y="4114799"/>
             <a:ext cx="0" cy="164592"/>
           </a:xfrm>
           <a:prstGeom prst="line">
@@ -5178,42 +5939,6 @@
           </a:fontRef>
         </p:style>
       </p:cxnSp>
-      <p:cxnSp>
-        <p:nvCxnSpPr>
-          <p:cNvPr id="28" name="p2_fan"/>
-          <p:cNvCxnSpPr/>
-          <p:nvPr/>
-        </p:nvCxnSpPr>
-        <p:spPr>
-          <a:xfrm flipH="1">
-            <a:off x="1990801" y="4087368"/>
-            <a:ext cx="2444039" cy="164592"/>
-          </a:xfrm>
-          <a:prstGeom prst="line">
-            <a:avLst/>
-          </a:prstGeom>
-          <a:ln w="17780">
-            <a:solidFill>
-              <a:srgbClr val="2E4A7A"/>
-            </a:solidFill>
-            <a:tailEnd type="triangle" w="sm" len="med"/>
-          </a:ln>
-        </p:spPr>
-        <p:style>
-          <a:lnRef idx="2">
-            <a:schemeClr val="accent1"/>
-          </a:lnRef>
-          <a:fillRef idx="0">
-            <a:schemeClr val="accent1"/>
-          </a:fillRef>
-          <a:effectRef idx="1">
-            <a:schemeClr val="accent1"/>
-          </a:effectRef>
-          <a:fontRef idx="minor">
-            <a:schemeClr val="tx1"/>
-          </a:fontRef>
-        </p:style>
-      </p:cxnSp>
       <p:sp>
         <p:nvSpPr>
           <p:cNvPr id="29" name="p2_cross"/>
@@ -5222,7 +5947,7 @@
         </p:nvSpPr>
         <p:spPr>
           <a:xfrm>
-            <a:off x="3798722" y="5257800"/>
+            <a:off x="4961538" y="5285231"/>
             <a:ext cx="6628180" cy="694944"/>
           </a:xfrm>
           <a:prstGeom prst="roundRect">
@@ -5255,7 +5980,7 @@
           </a:fontRef>
         </p:style>
         <p:txBody>
-          <a:bodyPr rtlCol="0" anchor="ctr" wrap="square" lIns="64008" rIns="64008" tIns="27432" bIns="27432">
+          <a:bodyPr wrap="square" lIns="64008" tIns="27432" rIns="64008" bIns="27432" rtlCol="0" anchor="ctr">
             <a:noAutofit/>
           </a:bodyPr>
           <a:lstStyle/>
@@ -5272,19 +5997,137 @@
               </a:spcAft>
             </a:pPr>
             <a:r>
-              <a:rPr sz="950" b="1" i="0">
+              <a:rPr sz="1200" b="1" i="0" dirty="0" err="1">
                 <a:solidFill>
                   <a:srgbClr val="1F2A37"/>
                 </a:solidFill>
                 <a:latin typeface="Tahoma"/>
                 <a:ea typeface="Tahoma"/>
-                <a:cs typeface="Tahoma"/>
-              </a:rPr>
-              <a:t>ادغام توجه متقابل (Transformer و TCN)</a:t>
-            </a:r>
-          </a:p>
-          <a:p>
-            <a:pPr rtl="1" algn="ctr">
+                <a:cs typeface="B Nazanin" panose="00000400000000000000" pitchFamily="2" charset="-78"/>
+              </a:rPr>
+              <a:t>ادغام</a:t>
+            </a:r>
+            <a:r>
+              <a:rPr sz="1200" b="1" i="0" dirty="0">
+                <a:solidFill>
+                  <a:srgbClr val="1F2A37"/>
+                </a:solidFill>
+                <a:latin typeface="Tahoma"/>
+                <a:ea typeface="Tahoma"/>
+                <a:cs typeface="B Nazanin" panose="00000400000000000000" pitchFamily="2" charset="-78"/>
+              </a:rPr>
+              <a:t> </a:t>
+            </a:r>
+            <a:r>
+              <a:rPr sz="1200" b="1" i="0" dirty="0" err="1">
+                <a:solidFill>
+                  <a:srgbClr val="1F2A37"/>
+                </a:solidFill>
+                <a:latin typeface="Tahoma"/>
+                <a:ea typeface="Tahoma"/>
+                <a:cs typeface="B Nazanin" panose="00000400000000000000" pitchFamily="2" charset="-78"/>
+              </a:rPr>
+              <a:t>توجه</a:t>
+            </a:r>
+            <a:r>
+              <a:rPr sz="1200" b="1" i="0" dirty="0">
+                <a:solidFill>
+                  <a:srgbClr val="1F2A37"/>
+                </a:solidFill>
+                <a:latin typeface="Tahoma"/>
+                <a:ea typeface="Tahoma"/>
+                <a:cs typeface="B Nazanin" panose="00000400000000000000" pitchFamily="2" charset="-78"/>
+              </a:rPr>
+              <a:t> </a:t>
+            </a:r>
+            <a:r>
+              <a:rPr sz="1200" b="1" i="0" dirty="0" err="1">
+                <a:solidFill>
+                  <a:srgbClr val="1F2A37"/>
+                </a:solidFill>
+                <a:latin typeface="Tahoma"/>
+                <a:ea typeface="Tahoma"/>
+                <a:cs typeface="B Nazanin" panose="00000400000000000000" pitchFamily="2" charset="-78"/>
+              </a:rPr>
+              <a:t>متقابل</a:t>
+            </a:r>
+            <a:r>
+              <a:rPr sz="1200" b="1" i="0" dirty="0">
+                <a:solidFill>
+                  <a:srgbClr val="1F2A37"/>
+                </a:solidFill>
+                <a:latin typeface="Tahoma"/>
+                <a:ea typeface="Tahoma"/>
+                <a:cs typeface="B Nazanin" panose="00000400000000000000" pitchFamily="2" charset="-78"/>
+              </a:rPr>
+              <a:t> </a:t>
+            </a:r>
+            <a:r>
+              <a:rPr lang="fa-IR" sz="1200" b="1" i="0" dirty="0" smtClean="0">
+                <a:solidFill>
+                  <a:srgbClr val="1F2A37"/>
+                </a:solidFill>
+                <a:latin typeface="Tahoma"/>
+                <a:ea typeface="Tahoma"/>
+                <a:cs typeface="B Nazanin" panose="00000400000000000000" pitchFamily="2" charset="-78"/>
+              </a:rPr>
+              <a:t>(</a:t>
+            </a:r>
+            <a:r>
+              <a:rPr sz="1200" b="1" i="0" dirty="0" smtClean="0">
+                <a:solidFill>
+                  <a:srgbClr val="1F2A37"/>
+                </a:solidFill>
+                <a:latin typeface="Tahoma"/>
+                <a:ea typeface="Tahoma"/>
+                <a:cs typeface="B Nazanin" panose="00000400000000000000" pitchFamily="2" charset="-78"/>
+              </a:rPr>
+              <a:t>Transformer </a:t>
+            </a:r>
+            <a:r>
+              <a:rPr sz="1200" b="1" i="0" dirty="0">
+                <a:solidFill>
+                  <a:srgbClr val="1F2A37"/>
+                </a:solidFill>
+                <a:latin typeface="Tahoma"/>
+                <a:ea typeface="Tahoma"/>
+                <a:cs typeface="B Nazanin" panose="00000400000000000000" pitchFamily="2" charset="-78"/>
+              </a:rPr>
+              <a:t>و </a:t>
+            </a:r>
+            <a:r>
+              <a:rPr sz="1200" b="1" i="0" dirty="0" smtClean="0">
+                <a:solidFill>
+                  <a:srgbClr val="1F2A37"/>
+                </a:solidFill>
+                <a:latin typeface="Tahoma"/>
+                <a:ea typeface="Tahoma"/>
+                <a:cs typeface="B Nazanin" panose="00000400000000000000" pitchFamily="2" charset="-78"/>
+              </a:rPr>
+              <a:t>TCN</a:t>
+            </a:r>
+            <a:r>
+              <a:rPr lang="fa-IR" sz="1200" b="1" i="0" dirty="0" smtClean="0">
+                <a:solidFill>
+                  <a:srgbClr val="1F2A37"/>
+                </a:solidFill>
+                <a:latin typeface="Tahoma"/>
+                <a:ea typeface="Tahoma"/>
+                <a:cs typeface="B Nazanin" panose="00000400000000000000" pitchFamily="2" charset="-78"/>
+              </a:rPr>
+              <a:t>)</a:t>
+            </a:r>
+            <a:endParaRPr sz="1200" b="1" i="0" dirty="0">
+              <a:solidFill>
+                <a:srgbClr val="1F2A37"/>
+              </a:solidFill>
+              <a:latin typeface="Tahoma"/>
+              <a:ea typeface="Tahoma"/>
+              <a:cs typeface="B Nazanin" panose="00000400000000000000" pitchFamily="2" charset="-78"/>
+            </a:endParaRPr>
+          </a:p>
+          <a:p>
+            <a:pPr algn="ctr" rtl="1">
               <a:lnSpc>
                 <a:spcPct val="100000"/>
               </a:lnSpc>
@@ -5296,16 +6139,222 @@
               </a:spcAft>
             </a:pPr>
             <a:r>
-              <a:rPr sz="750" b="0" i="0">
-                <a:solidFill>
-                  <a:srgbClr val="4B5563"/>
-                </a:solidFill>
-                <a:latin typeface="Tahoma"/>
-                <a:ea typeface="Tahoma"/>
-                <a:cs typeface="Tahoma"/>
-              </a:rPr>
-              <a:t>هر جریان با توجه به خروجی جریان دیگر بازبینی می‌شود</a:t>
-            </a:r>
+              <a:rPr sz="1050" b="0" i="0" dirty="0" err="1">
+                <a:solidFill>
+                  <a:srgbClr val="4B5563"/>
+                </a:solidFill>
+                <a:latin typeface="Tahoma"/>
+                <a:ea typeface="Tahoma"/>
+                <a:cs typeface="B Nazanin" panose="00000400000000000000" pitchFamily="2" charset="-78"/>
+              </a:rPr>
+              <a:t>هر</a:t>
+            </a:r>
+            <a:r>
+              <a:rPr sz="1050" b="0" i="0" dirty="0">
+                <a:solidFill>
+                  <a:srgbClr val="4B5563"/>
+                </a:solidFill>
+                <a:latin typeface="Tahoma"/>
+                <a:ea typeface="Tahoma"/>
+                <a:cs typeface="B Nazanin" panose="00000400000000000000" pitchFamily="2" charset="-78"/>
+              </a:rPr>
+              <a:t> </a:t>
+            </a:r>
+            <a:r>
+              <a:rPr sz="1050" b="0" i="0" dirty="0" err="1">
+                <a:solidFill>
+                  <a:srgbClr val="4B5563"/>
+                </a:solidFill>
+                <a:latin typeface="Tahoma"/>
+                <a:ea typeface="Tahoma"/>
+                <a:cs typeface="B Nazanin" panose="00000400000000000000" pitchFamily="2" charset="-78"/>
+              </a:rPr>
+              <a:t>جریان</a:t>
+            </a:r>
+            <a:r>
+              <a:rPr sz="1050" b="0" i="0" dirty="0">
+                <a:solidFill>
+                  <a:srgbClr val="4B5563"/>
+                </a:solidFill>
+                <a:latin typeface="Tahoma"/>
+                <a:ea typeface="Tahoma"/>
+                <a:cs typeface="B Nazanin" panose="00000400000000000000" pitchFamily="2" charset="-78"/>
+              </a:rPr>
+              <a:t> </a:t>
+            </a:r>
+            <a:r>
+              <a:rPr sz="1050" b="0" i="0" dirty="0" err="1">
+                <a:solidFill>
+                  <a:srgbClr val="4B5563"/>
+                </a:solidFill>
+                <a:latin typeface="Tahoma"/>
+                <a:ea typeface="Tahoma"/>
+                <a:cs typeface="B Nazanin" panose="00000400000000000000" pitchFamily="2" charset="-78"/>
+              </a:rPr>
+              <a:t>با</a:t>
+            </a:r>
+            <a:r>
+              <a:rPr sz="1050" b="0" i="0" dirty="0">
+                <a:solidFill>
+                  <a:srgbClr val="4B5563"/>
+                </a:solidFill>
+                <a:latin typeface="Tahoma"/>
+                <a:ea typeface="Tahoma"/>
+                <a:cs typeface="B Nazanin" panose="00000400000000000000" pitchFamily="2" charset="-78"/>
+              </a:rPr>
+              <a:t> </a:t>
+            </a:r>
+            <a:r>
+              <a:rPr sz="1050" b="0" i="0" dirty="0" err="1">
+                <a:solidFill>
+                  <a:srgbClr val="4B5563"/>
+                </a:solidFill>
+                <a:latin typeface="Tahoma"/>
+                <a:ea typeface="Tahoma"/>
+                <a:cs typeface="B Nazanin" panose="00000400000000000000" pitchFamily="2" charset="-78"/>
+              </a:rPr>
+              <a:t>توجه</a:t>
+            </a:r>
+            <a:r>
+              <a:rPr sz="1050" b="0" i="0" dirty="0">
+                <a:solidFill>
+                  <a:srgbClr val="4B5563"/>
+                </a:solidFill>
+                <a:latin typeface="Tahoma"/>
+                <a:ea typeface="Tahoma"/>
+                <a:cs typeface="B Nazanin" panose="00000400000000000000" pitchFamily="2" charset="-78"/>
+              </a:rPr>
+              <a:t> </a:t>
+            </a:r>
+            <a:r>
+              <a:rPr sz="1050" b="0" i="0" dirty="0" err="1">
+                <a:solidFill>
+                  <a:srgbClr val="4B5563"/>
+                </a:solidFill>
+                <a:latin typeface="Tahoma"/>
+                <a:ea typeface="Tahoma"/>
+                <a:cs typeface="B Nazanin" panose="00000400000000000000" pitchFamily="2" charset="-78"/>
+              </a:rPr>
+              <a:t>به</a:t>
+            </a:r>
+            <a:r>
+              <a:rPr sz="1050" b="0" i="0" dirty="0">
+                <a:solidFill>
+                  <a:srgbClr val="4B5563"/>
+                </a:solidFill>
+                <a:latin typeface="Tahoma"/>
+                <a:ea typeface="Tahoma"/>
+                <a:cs typeface="B Nazanin" panose="00000400000000000000" pitchFamily="2" charset="-78"/>
+              </a:rPr>
+              <a:t> </a:t>
+            </a:r>
+            <a:r>
+              <a:rPr sz="1050" b="0" i="0" dirty="0" err="1">
+                <a:solidFill>
+                  <a:srgbClr val="4B5563"/>
+                </a:solidFill>
+                <a:latin typeface="Tahoma"/>
+                <a:ea typeface="Tahoma"/>
+                <a:cs typeface="B Nazanin" panose="00000400000000000000" pitchFamily="2" charset="-78"/>
+              </a:rPr>
+              <a:t>خروجی</a:t>
+            </a:r>
+            <a:r>
+              <a:rPr sz="1050" b="0" i="0" dirty="0">
+                <a:solidFill>
+                  <a:srgbClr val="4B5563"/>
+                </a:solidFill>
+                <a:latin typeface="Tahoma"/>
+                <a:ea typeface="Tahoma"/>
+                <a:cs typeface="B Nazanin" panose="00000400000000000000" pitchFamily="2" charset="-78"/>
+              </a:rPr>
+              <a:t> </a:t>
+            </a:r>
+            <a:r>
+              <a:rPr sz="1050" b="0" i="0" dirty="0" err="1">
+                <a:solidFill>
+                  <a:srgbClr val="4B5563"/>
+                </a:solidFill>
+                <a:latin typeface="Tahoma"/>
+                <a:ea typeface="Tahoma"/>
+                <a:cs typeface="B Nazanin" panose="00000400000000000000" pitchFamily="2" charset="-78"/>
+              </a:rPr>
+              <a:t>جریان</a:t>
+            </a:r>
+            <a:r>
+              <a:rPr sz="1050" b="0" i="0" dirty="0">
+                <a:solidFill>
+                  <a:srgbClr val="4B5563"/>
+                </a:solidFill>
+                <a:latin typeface="Tahoma"/>
+                <a:ea typeface="Tahoma"/>
+                <a:cs typeface="B Nazanin" panose="00000400000000000000" pitchFamily="2" charset="-78"/>
+              </a:rPr>
+              <a:t> </a:t>
+            </a:r>
+            <a:r>
+              <a:rPr sz="1050" b="0" i="0" dirty="0" err="1">
+                <a:solidFill>
+                  <a:srgbClr val="4B5563"/>
+                </a:solidFill>
+                <a:latin typeface="Tahoma"/>
+                <a:ea typeface="Tahoma"/>
+                <a:cs typeface="B Nazanin" panose="00000400000000000000" pitchFamily="2" charset="-78"/>
+              </a:rPr>
+              <a:t>دیگر</a:t>
+            </a:r>
+            <a:r>
+              <a:rPr sz="1050" b="0" i="0" dirty="0">
+                <a:solidFill>
+                  <a:srgbClr val="4B5563"/>
+                </a:solidFill>
+                <a:latin typeface="Tahoma"/>
+                <a:ea typeface="Tahoma"/>
+                <a:cs typeface="B Nazanin" panose="00000400000000000000" pitchFamily="2" charset="-78"/>
+              </a:rPr>
+              <a:t> </a:t>
+            </a:r>
+            <a:r>
+              <a:rPr sz="1050" b="0" i="0" dirty="0" err="1">
+                <a:solidFill>
+                  <a:srgbClr val="4B5563"/>
+                </a:solidFill>
+                <a:latin typeface="Tahoma"/>
+                <a:ea typeface="Tahoma"/>
+                <a:cs typeface="B Nazanin" panose="00000400000000000000" pitchFamily="2" charset="-78"/>
+              </a:rPr>
+              <a:t>بازبینی</a:t>
+            </a:r>
+            <a:r>
+              <a:rPr sz="1050" b="0" i="0" dirty="0">
+                <a:solidFill>
+                  <a:srgbClr val="4B5563"/>
+                </a:solidFill>
+                <a:latin typeface="Tahoma"/>
+                <a:ea typeface="Tahoma"/>
+                <a:cs typeface="B Nazanin" panose="00000400000000000000" pitchFamily="2" charset="-78"/>
+              </a:rPr>
+              <a:t> </a:t>
+            </a:r>
+            <a:r>
+              <a:rPr sz="1050" b="0" i="0" dirty="0" err="1">
+                <a:solidFill>
+                  <a:srgbClr val="4B5563"/>
+                </a:solidFill>
+                <a:latin typeface="Tahoma"/>
+                <a:ea typeface="Tahoma"/>
+                <a:cs typeface="B Nazanin" panose="00000400000000000000" pitchFamily="2" charset="-78"/>
+              </a:rPr>
+              <a:t>می‌شود</a:t>
+            </a:r>
+            <a:endParaRPr sz="1050" b="0" i="0" dirty="0">
+              <a:solidFill>
+                <a:srgbClr val="4B5563"/>
+              </a:solidFill>
+              <a:latin typeface="Tahoma"/>
+              <a:ea typeface="Tahoma"/>
+              <a:cs typeface="B Nazanin" panose="00000400000000000000" pitchFamily="2" charset="-78"/>
+            </a:endParaRPr>
           </a:p>
         </p:txBody>
       </p:sp>
@@ -5317,7 +6366,7 @@
         </p:nvSpPr>
         <p:spPr>
           <a:xfrm>
-            <a:off x="384047" y="5257800"/>
+            <a:off x="1546863" y="5285231"/>
             <a:ext cx="3213506" cy="694944"/>
           </a:xfrm>
           <a:prstGeom prst="roundRect">
@@ -5350,7 +6399,7 @@
           </a:fontRef>
         </p:style>
         <p:txBody>
-          <a:bodyPr rtlCol="0" anchor="ctr" wrap="square" lIns="64008" rIns="64008" tIns="27432" bIns="27432">
+          <a:bodyPr wrap="square" lIns="64008" tIns="27432" rIns="64008" bIns="27432" rtlCol="0" anchor="ctr">
             <a:noAutofit/>
           </a:bodyPr>
           <a:lstStyle/>
@@ -5367,19 +6416,49 @@
               </a:spcAft>
             </a:pPr>
             <a:r>
-              <a:rPr sz="950" b="1" i="0">
+              <a:rPr sz="1200" b="1" i="0" dirty="0" err="1">
                 <a:solidFill>
                   <a:srgbClr val="1F2A37"/>
                 </a:solidFill>
                 <a:latin typeface="Tahoma"/>
                 <a:ea typeface="Tahoma"/>
-                <a:cs typeface="Tahoma"/>
-              </a:rPr>
-              <a:t>ادغام سه‌جریانه</a:t>
-            </a:r>
-          </a:p>
-          <a:p>
-            <a:pPr rtl="1" algn="ctr">
+                <a:cs typeface="B Nazanin" panose="00000400000000000000" pitchFamily="2" charset="-78"/>
+              </a:rPr>
+              <a:t>ادغام</a:t>
+            </a:r>
+            <a:r>
+              <a:rPr sz="1200" b="1" i="0" dirty="0">
+                <a:solidFill>
+                  <a:srgbClr val="1F2A37"/>
+                </a:solidFill>
+                <a:latin typeface="Tahoma"/>
+                <a:ea typeface="Tahoma"/>
+                <a:cs typeface="B Nazanin" panose="00000400000000000000" pitchFamily="2" charset="-78"/>
+              </a:rPr>
+              <a:t> </a:t>
+            </a:r>
+            <a:r>
+              <a:rPr sz="1200" b="1" i="0" dirty="0" err="1">
+                <a:solidFill>
+                  <a:srgbClr val="1F2A37"/>
+                </a:solidFill>
+                <a:latin typeface="Tahoma"/>
+                <a:ea typeface="Tahoma"/>
+                <a:cs typeface="B Nazanin" panose="00000400000000000000" pitchFamily="2" charset="-78"/>
+              </a:rPr>
+              <a:t>سه‌جریانه</a:t>
+            </a:r>
+            <a:endParaRPr sz="1200" b="1" i="0" dirty="0">
+              <a:solidFill>
+                <a:srgbClr val="1F2A37"/>
+              </a:solidFill>
+              <a:latin typeface="Tahoma"/>
+              <a:ea typeface="Tahoma"/>
+              <a:cs typeface="B Nazanin" panose="00000400000000000000" pitchFamily="2" charset="-78"/>
+            </a:endParaRPr>
+          </a:p>
+          <a:p>
+            <a:pPr algn="ctr" rtl="1">
               <a:lnSpc>
                 <a:spcPct val="100000"/>
               </a:lnSpc>
@@ -5391,16 +6470,90 @@
               </a:spcAft>
             </a:pPr>
             <a:r>
-              <a:rPr sz="750" b="0" i="0">
-                <a:solidFill>
-                  <a:srgbClr val="4B5563"/>
-                </a:solidFill>
-                <a:latin typeface="Tahoma"/>
-                <a:ea typeface="Tahoma"/>
-                <a:cs typeface="Tahoma"/>
-              </a:rPr>
-              <a:t>ترتیب + گراف + تعامل</a:t>
-            </a:r>
+              <a:rPr sz="1050" b="0" i="0" dirty="0" err="1">
+                <a:solidFill>
+                  <a:srgbClr val="4B5563"/>
+                </a:solidFill>
+                <a:latin typeface="Tahoma"/>
+                <a:ea typeface="Tahoma"/>
+                <a:cs typeface="B Nazanin" panose="00000400000000000000" pitchFamily="2" charset="-78"/>
+              </a:rPr>
+              <a:t>ترتیب</a:t>
+            </a:r>
+            <a:r>
+              <a:rPr sz="1050" b="0" i="0" dirty="0">
+                <a:solidFill>
+                  <a:srgbClr val="4B5563"/>
+                </a:solidFill>
+                <a:latin typeface="Tahoma"/>
+                <a:ea typeface="Tahoma"/>
+                <a:cs typeface="B Nazanin" panose="00000400000000000000" pitchFamily="2" charset="-78"/>
+              </a:rPr>
+              <a:t> </a:t>
+            </a:r>
+            <a:r>
+              <a:rPr lang="fa-IR" sz="1050" b="0" i="0" dirty="0" smtClean="0">
+                <a:solidFill>
+                  <a:srgbClr val="4B5563"/>
+                </a:solidFill>
+                <a:latin typeface="Tahoma"/>
+                <a:ea typeface="Tahoma"/>
+                <a:cs typeface="B Nazanin" panose="00000400000000000000" pitchFamily="2" charset="-78"/>
+              </a:rPr>
+              <a:t> </a:t>
+            </a:r>
+            <a:r>
+              <a:rPr sz="1050" b="0" i="0" dirty="0" smtClean="0">
+                <a:solidFill>
+                  <a:srgbClr val="4B5563"/>
+                </a:solidFill>
+                <a:latin typeface="Tahoma"/>
+                <a:ea typeface="Tahoma"/>
+                <a:cs typeface="B Nazanin" panose="00000400000000000000" pitchFamily="2" charset="-78"/>
+              </a:rPr>
+              <a:t>+ </a:t>
+            </a:r>
+            <a:r>
+              <a:rPr sz="1050" b="0" i="0" dirty="0" err="1">
+                <a:solidFill>
+                  <a:srgbClr val="4B5563"/>
+                </a:solidFill>
+                <a:latin typeface="Tahoma"/>
+                <a:ea typeface="Tahoma"/>
+                <a:cs typeface="B Nazanin" panose="00000400000000000000" pitchFamily="2" charset="-78"/>
+              </a:rPr>
+              <a:t>گراف</a:t>
+            </a:r>
+            <a:r>
+              <a:rPr sz="1050" b="0" i="0" dirty="0">
+                <a:solidFill>
+                  <a:srgbClr val="4B5563"/>
+                </a:solidFill>
+                <a:latin typeface="Tahoma"/>
+                <a:ea typeface="Tahoma"/>
+                <a:cs typeface="B Nazanin" panose="00000400000000000000" pitchFamily="2" charset="-78"/>
+              </a:rPr>
+              <a:t> + </a:t>
+            </a:r>
+            <a:r>
+              <a:rPr sz="1050" b="0" i="0" dirty="0" err="1">
+                <a:solidFill>
+                  <a:srgbClr val="4B5563"/>
+                </a:solidFill>
+                <a:latin typeface="Tahoma"/>
+                <a:ea typeface="Tahoma"/>
+                <a:cs typeface="B Nazanin" panose="00000400000000000000" pitchFamily="2" charset="-78"/>
+              </a:rPr>
+              <a:t>تعامل</a:t>
+            </a:r>
+            <a:endParaRPr sz="1050" b="0" i="0" dirty="0">
+              <a:solidFill>
+                <a:srgbClr val="4B5563"/>
+              </a:solidFill>
+              <a:latin typeface="Tahoma"/>
+              <a:ea typeface="Tahoma"/>
+              <a:cs typeface="B Nazanin" panose="00000400000000000000" pitchFamily="2" charset="-78"/>
+            </a:endParaRPr>
           </a:p>
         </p:txBody>
       </p:sp>
@@ -5412,7 +6565,7 @@
         </p:nvCxnSpPr>
         <p:spPr>
           <a:xfrm>
-            <a:off x="8820150" y="5093208"/>
+            <a:off x="9982966" y="5120639"/>
             <a:ext cx="0" cy="164592"/>
           </a:xfrm>
           <a:prstGeom prst="line">
@@ -5448,7 +6601,7 @@
         </p:nvCxnSpPr>
         <p:spPr>
           <a:xfrm>
-            <a:off x="5405475" y="5093208"/>
+            <a:off x="6568291" y="5120639"/>
             <a:ext cx="0" cy="164592"/>
           </a:xfrm>
           <a:prstGeom prst="line">
@@ -5484,7 +6637,7 @@
         </p:nvCxnSpPr>
         <p:spPr>
           <a:xfrm>
-            <a:off x="1990801" y="5093208"/>
+            <a:off x="3153617" y="5120639"/>
             <a:ext cx="0" cy="164592"/>
           </a:xfrm>
           <a:prstGeom prst="line">
@@ -5520,7 +6673,7 @@
         </p:nvCxnSpPr>
         <p:spPr>
           <a:xfrm flipH="1">
-            <a:off x="3597554" y="5605272"/>
+            <a:off x="4760370" y="5632703"/>
             <a:ext cx="201168" cy="0"/>
           </a:xfrm>
           <a:prstGeom prst="line">
@@ -5556,7 +6709,7 @@
         </p:nvSpPr>
         <p:spPr>
           <a:xfrm>
-            <a:off x="7213396" y="6108192"/>
+            <a:off x="8376212" y="6135623"/>
             <a:ext cx="3213506" cy="347472"/>
           </a:xfrm>
           <a:prstGeom prst="roundRect">
@@ -5589,7 +6742,7 @@
           </a:fontRef>
         </p:style>
         <p:txBody>
-          <a:bodyPr rtlCol="0" anchor="ctr" wrap="square" lIns="64008" rIns="64008" tIns="27432" bIns="27432">
+          <a:bodyPr wrap="square" lIns="64008" tIns="27432" rIns="64008" bIns="27432" rtlCol="0" anchor="ctr">
             <a:noAutofit/>
           </a:bodyPr>
           <a:lstStyle/>
@@ -5606,19 +6759,93 @@
               </a:spcAft>
             </a:pPr>
             <a:r>
-              <a:rPr sz="850" b="1" i="0">
+              <a:rPr sz="1100" b="1" i="0" dirty="0" err="1">
                 <a:solidFill>
                   <a:srgbClr val="1F2A37"/>
                 </a:solidFill>
                 <a:latin typeface="Tahoma"/>
                 <a:ea typeface="Tahoma"/>
-                <a:cs typeface="Tahoma"/>
-              </a:rPr>
-              <a:t>کدگذاری ورودی (۲۵۶)</a:t>
-            </a:r>
-          </a:p>
-          <a:p>
-            <a:pPr rtl="1" algn="ctr">
+                <a:cs typeface="B Nazanin" panose="00000400000000000000" pitchFamily="2" charset="-78"/>
+              </a:rPr>
+              <a:t>کدگذاری</a:t>
+            </a:r>
+            <a:r>
+              <a:rPr sz="1100" b="1" i="0" dirty="0">
+                <a:solidFill>
+                  <a:srgbClr val="1F2A37"/>
+                </a:solidFill>
+                <a:latin typeface="Tahoma"/>
+                <a:ea typeface="Tahoma"/>
+                <a:cs typeface="B Nazanin" panose="00000400000000000000" pitchFamily="2" charset="-78"/>
+              </a:rPr>
+              <a:t> </a:t>
+            </a:r>
+            <a:r>
+              <a:rPr sz="1100" b="1" i="0" dirty="0" err="1">
+                <a:solidFill>
+                  <a:srgbClr val="1F2A37"/>
+                </a:solidFill>
+                <a:latin typeface="Tahoma"/>
+                <a:ea typeface="Tahoma"/>
+                <a:cs typeface="B Nazanin" panose="00000400000000000000" pitchFamily="2" charset="-78"/>
+              </a:rPr>
+              <a:t>ورودی</a:t>
+            </a:r>
+            <a:r>
+              <a:rPr sz="1100" b="1" i="0" dirty="0">
+                <a:solidFill>
+                  <a:srgbClr val="1F2A37"/>
+                </a:solidFill>
+                <a:latin typeface="Tahoma"/>
+                <a:ea typeface="Tahoma"/>
+                <a:cs typeface="B Nazanin" panose="00000400000000000000" pitchFamily="2" charset="-78"/>
+              </a:rPr>
+              <a:t> </a:t>
+            </a:r>
+            <a:r>
+              <a:rPr lang="fa-IR" sz="1100" b="1" i="0" dirty="0" smtClean="0">
+                <a:solidFill>
+                  <a:srgbClr val="1F2A37"/>
+                </a:solidFill>
+                <a:latin typeface="Tahoma"/>
+                <a:ea typeface="Tahoma"/>
+                <a:cs typeface="B Nazanin" panose="00000400000000000000" pitchFamily="2" charset="-78"/>
+              </a:rPr>
+              <a:t>(</a:t>
+            </a:r>
+            <a:r>
+              <a:rPr sz="1100" b="1" i="0" dirty="0" smtClean="0">
+                <a:solidFill>
+                  <a:srgbClr val="1F2A37"/>
+                </a:solidFill>
+                <a:latin typeface="Tahoma"/>
+                <a:ea typeface="Tahoma"/>
+                <a:cs typeface="B Nazanin" panose="00000400000000000000" pitchFamily="2" charset="-78"/>
+              </a:rPr>
+              <a:t>۲۵۶</a:t>
+            </a:r>
+            <a:r>
+              <a:rPr lang="fa-IR" sz="1100" b="1" i="0" dirty="0" smtClean="0">
+                <a:solidFill>
+                  <a:srgbClr val="1F2A37"/>
+                </a:solidFill>
+                <a:latin typeface="Tahoma"/>
+                <a:ea typeface="Tahoma"/>
+                <a:cs typeface="B Nazanin" panose="00000400000000000000" pitchFamily="2" charset="-78"/>
+              </a:rPr>
+              <a:t>)</a:t>
+            </a:r>
+            <a:endParaRPr sz="1100" b="1" i="0" dirty="0">
+              <a:solidFill>
+                <a:srgbClr val="1F2A37"/>
+              </a:solidFill>
+              <a:latin typeface="Tahoma"/>
+              <a:ea typeface="Tahoma"/>
+              <a:cs typeface="B Nazanin" panose="00000400000000000000" pitchFamily="2" charset="-78"/>
+            </a:endParaRPr>
+          </a:p>
+          <a:p>
+            <a:pPr algn="ctr" rtl="1">
               <a:lnSpc>
                 <a:spcPct val="100000"/>
               </a:lnSpc>
@@ -5630,16 +6857,112 @@
               </a:spcAft>
             </a:pPr>
             <a:r>
-              <a:rPr sz="680" b="0" i="0">
-                <a:solidFill>
-                  <a:srgbClr val="4B5563"/>
-                </a:solidFill>
-                <a:latin typeface="Tahoma"/>
-                <a:ea typeface="Tahoma"/>
-                <a:cs typeface="Tahoma"/>
-              </a:rPr>
-              <a:t>تعبیهٔ فعالیت، موقعیت و موقعیت نسبی</a:t>
-            </a:r>
+              <a:rPr sz="1050" b="0" i="0" dirty="0" err="1" smtClean="0">
+                <a:solidFill>
+                  <a:srgbClr val="4B5563"/>
+                </a:solidFill>
+                <a:latin typeface="Tahoma"/>
+                <a:ea typeface="Tahoma"/>
+                <a:cs typeface="B Nazanin" panose="00000400000000000000" pitchFamily="2" charset="-78"/>
+              </a:rPr>
+              <a:t>تعبیه</a:t>
+            </a:r>
+            <a:r>
+              <a:rPr sz="1050" b="0" i="0" dirty="0" smtClean="0">
+                <a:solidFill>
+                  <a:srgbClr val="4B5563"/>
+                </a:solidFill>
+                <a:latin typeface="Tahoma"/>
+                <a:ea typeface="Tahoma"/>
+                <a:cs typeface="B Nazanin" panose="00000400000000000000" pitchFamily="2" charset="-78"/>
+              </a:rPr>
+              <a:t> </a:t>
+            </a:r>
+            <a:r>
+              <a:rPr sz="1050" b="0" i="0" dirty="0" err="1">
+                <a:solidFill>
+                  <a:srgbClr val="4B5563"/>
+                </a:solidFill>
+                <a:latin typeface="Tahoma"/>
+                <a:ea typeface="Tahoma"/>
+                <a:cs typeface="B Nazanin" panose="00000400000000000000" pitchFamily="2" charset="-78"/>
+              </a:rPr>
+              <a:t>فعالیت</a:t>
+            </a:r>
+            <a:r>
+              <a:rPr sz="1050" b="0" i="0" dirty="0">
+                <a:solidFill>
+                  <a:srgbClr val="4B5563"/>
+                </a:solidFill>
+                <a:latin typeface="Tahoma"/>
+                <a:ea typeface="Tahoma"/>
+                <a:cs typeface="B Nazanin" panose="00000400000000000000" pitchFamily="2" charset="-78"/>
+              </a:rPr>
+              <a:t>، </a:t>
+            </a:r>
+            <a:r>
+              <a:rPr sz="1050" b="0" i="0" dirty="0" err="1">
+                <a:solidFill>
+                  <a:srgbClr val="4B5563"/>
+                </a:solidFill>
+                <a:latin typeface="Tahoma"/>
+                <a:ea typeface="Tahoma"/>
+                <a:cs typeface="B Nazanin" panose="00000400000000000000" pitchFamily="2" charset="-78"/>
+              </a:rPr>
+              <a:t>موقعیت</a:t>
+            </a:r>
+            <a:r>
+              <a:rPr sz="1050" b="0" i="0" dirty="0">
+                <a:solidFill>
+                  <a:srgbClr val="4B5563"/>
+                </a:solidFill>
+                <a:latin typeface="Tahoma"/>
+                <a:ea typeface="Tahoma"/>
+                <a:cs typeface="B Nazanin" panose="00000400000000000000" pitchFamily="2" charset="-78"/>
+              </a:rPr>
+              <a:t> و </a:t>
+            </a:r>
+            <a:r>
+              <a:rPr sz="1050" b="0" i="0" dirty="0" err="1">
+                <a:solidFill>
+                  <a:srgbClr val="4B5563"/>
+                </a:solidFill>
+                <a:latin typeface="Tahoma"/>
+                <a:ea typeface="Tahoma"/>
+                <a:cs typeface="B Nazanin" panose="00000400000000000000" pitchFamily="2" charset="-78"/>
+              </a:rPr>
+              <a:t>موقعیت</a:t>
+            </a:r>
+            <a:r>
+              <a:rPr sz="1050" b="0" i="0" dirty="0">
+                <a:solidFill>
+                  <a:srgbClr val="4B5563"/>
+                </a:solidFill>
+                <a:latin typeface="Tahoma"/>
+                <a:ea typeface="Tahoma"/>
+                <a:cs typeface="B Nazanin" panose="00000400000000000000" pitchFamily="2" charset="-78"/>
+              </a:rPr>
+              <a:t> </a:t>
+            </a:r>
+            <a:r>
+              <a:rPr sz="1050" b="0" i="0" dirty="0" err="1">
+                <a:solidFill>
+                  <a:srgbClr val="4B5563"/>
+                </a:solidFill>
+                <a:latin typeface="Tahoma"/>
+                <a:ea typeface="Tahoma"/>
+                <a:cs typeface="B Nazanin" panose="00000400000000000000" pitchFamily="2" charset="-78"/>
+              </a:rPr>
+              <a:t>نسبی</a:t>
+            </a:r>
+            <a:endParaRPr sz="1050" b="0" i="0" dirty="0">
+              <a:solidFill>
+                <a:srgbClr val="4B5563"/>
+              </a:solidFill>
+              <a:latin typeface="Tahoma"/>
+              <a:ea typeface="Tahoma"/>
+              <a:cs typeface="B Nazanin" panose="00000400000000000000" pitchFamily="2" charset="-78"/>
+            </a:endParaRPr>
           </a:p>
         </p:txBody>
       </p:sp>
@@ -5651,7 +6974,7 @@
         </p:nvSpPr>
         <p:spPr>
           <a:xfrm>
-            <a:off x="3798722" y="6108192"/>
+            <a:off x="4961538" y="6135623"/>
             <a:ext cx="3213506" cy="347472"/>
           </a:xfrm>
           <a:prstGeom prst="roundRect">
@@ -5684,7 +7007,7 @@
           </a:fontRef>
         </p:style>
         <p:txBody>
-          <a:bodyPr rtlCol="0" anchor="ctr" wrap="square" lIns="64008" rIns="64008" tIns="27432" bIns="27432">
+          <a:bodyPr wrap="square" lIns="64008" tIns="27432" rIns="64008" bIns="27432" rtlCol="0" anchor="ctr">
             <a:noAutofit/>
           </a:bodyPr>
           <a:lstStyle/>
@@ -5701,19 +7024,49 @@
               </a:spcAft>
             </a:pPr>
             <a:r>
-              <a:rPr sz="850" b="1" i="0">
+              <a:rPr sz="1100" b="1" i="0" dirty="0" err="1">
                 <a:solidFill>
                   <a:srgbClr val="1F2A37"/>
                 </a:solidFill>
                 <a:latin typeface="Tahoma"/>
                 <a:ea typeface="Tahoma"/>
-                <a:cs typeface="Tahoma"/>
-              </a:rPr>
-              <a:t>کدگذاری زمانی</a:t>
-            </a:r>
-          </a:p>
-          <a:p>
-            <a:pPr rtl="1" algn="ctr">
+                <a:cs typeface="B Nazanin" panose="00000400000000000000" pitchFamily="2" charset="-78"/>
+              </a:rPr>
+              <a:t>کدگذاری</a:t>
+            </a:r>
+            <a:r>
+              <a:rPr sz="1100" b="1" i="0" dirty="0">
+                <a:solidFill>
+                  <a:srgbClr val="1F2A37"/>
+                </a:solidFill>
+                <a:latin typeface="Tahoma"/>
+                <a:ea typeface="Tahoma"/>
+                <a:cs typeface="B Nazanin" panose="00000400000000000000" pitchFamily="2" charset="-78"/>
+              </a:rPr>
+              <a:t> </a:t>
+            </a:r>
+            <a:r>
+              <a:rPr sz="1100" b="1" i="0" dirty="0" err="1">
+                <a:solidFill>
+                  <a:srgbClr val="1F2A37"/>
+                </a:solidFill>
+                <a:latin typeface="Tahoma"/>
+                <a:ea typeface="Tahoma"/>
+                <a:cs typeface="B Nazanin" panose="00000400000000000000" pitchFamily="2" charset="-78"/>
+              </a:rPr>
+              <a:t>زمانی</a:t>
+            </a:r>
+            <a:endParaRPr sz="1100" b="1" i="0" dirty="0">
+              <a:solidFill>
+                <a:srgbClr val="1F2A37"/>
+              </a:solidFill>
+              <a:latin typeface="Tahoma"/>
+              <a:ea typeface="Tahoma"/>
+              <a:cs typeface="B Nazanin" panose="00000400000000000000" pitchFamily="2" charset="-78"/>
+            </a:endParaRPr>
+          </a:p>
+          <a:p>
+            <a:pPr algn="ctr" rtl="1">
               <a:lnSpc>
                 <a:spcPct val="100000"/>
               </a:lnSpc>
@@ -5725,16 +7078,112 @@
               </a:spcAft>
             </a:pPr>
             <a:r>
-              <a:rPr sz="680" b="0" i="0">
-                <a:solidFill>
-                  <a:srgbClr val="4B5563"/>
-                </a:solidFill>
-                <a:latin typeface="Tahoma"/>
-                <a:ea typeface="Tahoma"/>
-                <a:cs typeface="Tahoma"/>
-              </a:rPr>
-              <a:t>log(Δt) و log(زمان تجمعی)</a:t>
-            </a:r>
+              <a:rPr sz="1050" b="0" i="0" dirty="0">
+                <a:solidFill>
+                  <a:srgbClr val="4B5563"/>
+                </a:solidFill>
+                <a:latin typeface="Tahoma"/>
+                <a:ea typeface="Tahoma"/>
+                <a:cs typeface="B Nazanin" panose="00000400000000000000" pitchFamily="2" charset="-78"/>
+              </a:rPr>
+              <a:t>log(</a:t>
+            </a:r>
+            <a:r>
+              <a:rPr sz="1050" b="0" i="0" dirty="0" err="1">
+                <a:solidFill>
+                  <a:srgbClr val="4B5563"/>
+                </a:solidFill>
+                <a:latin typeface="Tahoma"/>
+                <a:ea typeface="Tahoma"/>
+                <a:cs typeface="B Nazanin" panose="00000400000000000000" pitchFamily="2" charset="-78"/>
+              </a:rPr>
+              <a:t>Δt</a:t>
+            </a:r>
+            <a:r>
+              <a:rPr sz="1050" b="0" i="0" dirty="0">
+                <a:solidFill>
+                  <a:srgbClr val="4B5563"/>
+                </a:solidFill>
+                <a:latin typeface="Tahoma"/>
+                <a:ea typeface="Tahoma"/>
+                <a:cs typeface="B Nazanin" panose="00000400000000000000" pitchFamily="2" charset="-78"/>
+              </a:rPr>
+              <a:t>) و </a:t>
+            </a:r>
+            <a:r>
+              <a:rPr sz="1050" b="0" i="0" dirty="0" smtClean="0">
+                <a:solidFill>
+                  <a:srgbClr val="4B5563"/>
+                </a:solidFill>
+                <a:latin typeface="Tahoma"/>
+                <a:ea typeface="Tahoma"/>
+                <a:cs typeface="B Nazanin" panose="00000400000000000000" pitchFamily="2" charset="-78"/>
+              </a:rPr>
+              <a:t>log</a:t>
+            </a:r>
+            <a:r>
+              <a:rPr lang="fa-IR" sz="1050" b="0" i="0" dirty="0" smtClean="0">
+                <a:solidFill>
+                  <a:srgbClr val="4B5563"/>
+                </a:solidFill>
+                <a:latin typeface="Tahoma"/>
+                <a:ea typeface="Tahoma"/>
+                <a:cs typeface="B Nazanin" panose="00000400000000000000" pitchFamily="2" charset="-78"/>
+              </a:rPr>
+              <a:t>(</a:t>
+            </a:r>
+            <a:r>
+              <a:rPr sz="1050" b="0" i="0" dirty="0" err="1" smtClean="0">
+                <a:solidFill>
+                  <a:srgbClr val="4B5563"/>
+                </a:solidFill>
+                <a:latin typeface="Tahoma"/>
+                <a:ea typeface="Tahoma"/>
+                <a:cs typeface="B Nazanin" panose="00000400000000000000" pitchFamily="2" charset="-78"/>
+              </a:rPr>
+              <a:t>زمان</a:t>
+            </a:r>
+            <a:r>
+              <a:rPr sz="1050" b="0" i="0" dirty="0" smtClean="0">
+                <a:solidFill>
+                  <a:srgbClr val="4B5563"/>
+                </a:solidFill>
+                <a:latin typeface="Tahoma"/>
+                <a:ea typeface="Tahoma"/>
+                <a:cs typeface="B Nazanin" panose="00000400000000000000" pitchFamily="2" charset="-78"/>
+              </a:rPr>
+              <a:t> </a:t>
+            </a:r>
+            <a:r>
+              <a:rPr sz="1050" b="0" i="0" dirty="0" err="1" smtClean="0">
+                <a:solidFill>
+                  <a:srgbClr val="4B5563"/>
+                </a:solidFill>
+                <a:latin typeface="Tahoma"/>
+                <a:ea typeface="Tahoma"/>
+                <a:cs typeface="B Nazanin" panose="00000400000000000000" pitchFamily="2" charset="-78"/>
+              </a:rPr>
+              <a:t>تجمعی</a:t>
+            </a:r>
+            <a:r>
+              <a:rPr lang="fa-IR" sz="1050" b="0" i="0" dirty="0" smtClean="0">
+                <a:solidFill>
+                  <a:srgbClr val="4B5563"/>
+                </a:solidFill>
+                <a:latin typeface="Tahoma"/>
+                <a:ea typeface="Tahoma"/>
+                <a:cs typeface="B Nazanin" panose="00000400000000000000" pitchFamily="2" charset="-78"/>
+              </a:rPr>
+              <a:t>)</a:t>
+            </a:r>
+            <a:endParaRPr sz="1050" b="0" i="0" dirty="0">
+              <a:solidFill>
+                <a:srgbClr val="4B5563"/>
+              </a:solidFill>
+              <a:latin typeface="Tahoma"/>
+              <a:ea typeface="Tahoma"/>
+              <a:cs typeface="B Nazanin" panose="00000400000000000000" pitchFamily="2" charset="-78"/>
+            </a:endParaRPr>
           </a:p>
         </p:txBody>
       </p:sp>
@@ -5746,7 +7195,7 @@
         </p:nvSpPr>
         <p:spPr>
           <a:xfrm>
-            <a:off x="384047" y="6108192"/>
+            <a:off x="1546863" y="6135623"/>
             <a:ext cx="3213506" cy="347472"/>
           </a:xfrm>
           <a:prstGeom prst="roundRect">
@@ -5779,7 +7228,7 @@
           </a:fontRef>
         </p:style>
         <p:txBody>
-          <a:bodyPr rtlCol="0" anchor="ctr" wrap="square" lIns="64008" rIns="64008" tIns="27432" bIns="27432">
+          <a:bodyPr wrap="square" lIns="64008" tIns="27432" rIns="64008" bIns="27432" rtlCol="0" anchor="ctr">
             <a:noAutofit/>
           </a:bodyPr>
           <a:lstStyle/>
@@ -5796,19 +7245,19 @@
               </a:spcAft>
             </a:pPr>
             <a:r>
-              <a:rPr sz="850" b="1" i="0">
+              <a:rPr sz="1100" b="1" i="0">
                 <a:solidFill>
                   <a:srgbClr val="1F2A37"/>
                 </a:solidFill>
                 <a:latin typeface="Tahoma"/>
                 <a:ea typeface="Tahoma"/>
-                <a:cs typeface="Tahoma"/>
+                <a:cs typeface="B Nazanin" panose="00000400000000000000" pitchFamily="2" charset="-78"/>
               </a:rPr>
               <a:t>نرمال‌سازی و تنظیم</a:t>
             </a:r>
           </a:p>
           <a:p>
-            <a:pPr rtl="1" algn="ctr">
+            <a:pPr algn="ctr" rtl="1">
               <a:lnSpc>
                 <a:spcPct val="100000"/>
               </a:lnSpc>
@@ -5820,13 +7269,13 @@
               </a:spcAft>
             </a:pPr>
             <a:r>
-              <a:rPr sz="680" b="0" i="0">
-                <a:solidFill>
-                  <a:srgbClr val="4B5563"/>
-                </a:solidFill>
-                <a:latin typeface="Tahoma"/>
-                <a:ea typeface="Tahoma"/>
-                <a:cs typeface="Tahoma"/>
+              <a:rPr sz="1050" b="0" i="0">
+                <a:solidFill>
+                  <a:srgbClr val="4B5563"/>
+                </a:solidFill>
+                <a:latin typeface="Tahoma"/>
+                <a:ea typeface="Tahoma"/>
+                <a:cs typeface="B Nazanin" panose="00000400000000000000" pitchFamily="2" charset="-78"/>
               </a:rPr>
               <a:t>LayerNorm • Dropout ۰٫۰۵ • ماسک‌ها</a:t>
             </a:r>
@@ -5841,7 +7290,7 @@
         </p:nvSpPr>
         <p:spPr>
           <a:xfrm>
-            <a:off x="7213396" y="6583680"/>
+            <a:off x="8376212" y="6611111"/>
             <a:ext cx="3213506" cy="347472"/>
           </a:xfrm>
           <a:prstGeom prst="roundRect">
@@ -5874,7 +7323,7 @@
           </a:fontRef>
         </p:style>
         <p:txBody>
-          <a:bodyPr rtlCol="0" anchor="ctr" wrap="square" lIns="64008" rIns="64008" tIns="27432" bIns="27432">
+          <a:bodyPr wrap="square" lIns="64008" tIns="27432" rIns="64008" bIns="27432" rtlCol="0" anchor="ctr">
             <a:noAutofit/>
           </a:bodyPr>
           <a:lstStyle/>
@@ -5891,19 +7340,30 @@
               </a:spcAft>
             </a:pPr>
             <a:r>
-              <a:rPr sz="850" b="1" i="0">
+              <a:rPr sz="1100" b="1" i="0" dirty="0" err="1">
                 <a:solidFill>
                   <a:srgbClr val="1F2A37"/>
                 </a:solidFill>
                 <a:latin typeface="Tahoma"/>
                 <a:ea typeface="Tahoma"/>
-                <a:cs typeface="Tahoma"/>
-              </a:rPr>
-              <a:t>کدگذار Transformer</a:t>
-            </a:r>
-          </a:p>
-          <a:p>
-            <a:pPr rtl="1" algn="ctr">
+                <a:cs typeface="B Nazanin" panose="00000400000000000000" pitchFamily="2" charset="-78"/>
+              </a:rPr>
+              <a:t>کدگذار</a:t>
+            </a:r>
+            <a:r>
+              <a:rPr sz="1100" b="1" i="0" dirty="0">
+                <a:solidFill>
+                  <a:srgbClr val="1F2A37"/>
+                </a:solidFill>
+                <a:latin typeface="Tahoma"/>
+                <a:ea typeface="Tahoma"/>
+                <a:cs typeface="B Nazanin" panose="00000400000000000000" pitchFamily="2" charset="-78"/>
+              </a:rPr>
+              <a:t> Transformer</a:t>
+            </a:r>
+          </a:p>
+          <a:p>
+            <a:pPr algn="ctr" rtl="1">
               <a:lnSpc>
                 <a:spcPct val="100000"/>
               </a:lnSpc>
@@ -5915,15 +7375,103 @@
               </a:spcAft>
             </a:pPr>
             <a:r>
-              <a:rPr sz="680" b="0" i="0">
-                <a:solidFill>
-                  <a:srgbClr val="4B5563"/>
-                </a:solidFill>
-                <a:latin typeface="Tahoma"/>
-                <a:ea typeface="Tahoma"/>
-                <a:cs typeface="Tahoma"/>
-              </a:rPr>
-              <a:t>۶ لایه • ۸ سر • پیش‌خور ۱۰۲۴</a:t>
+              <a:rPr sz="1050" b="0" i="0" dirty="0">
+                <a:solidFill>
+                  <a:srgbClr val="4B5563"/>
+                </a:solidFill>
+                <a:latin typeface="Tahoma"/>
+                <a:ea typeface="Tahoma"/>
+                <a:cs typeface="B Nazanin" panose="00000400000000000000" pitchFamily="2" charset="-78"/>
+              </a:rPr>
+              <a:t>۶ </a:t>
+            </a:r>
+            <a:r>
+              <a:rPr sz="1050" b="0" i="0" dirty="0" err="1">
+                <a:solidFill>
+                  <a:srgbClr val="4B5563"/>
+                </a:solidFill>
+                <a:latin typeface="Tahoma"/>
+                <a:ea typeface="Tahoma"/>
+                <a:cs typeface="B Nazanin" panose="00000400000000000000" pitchFamily="2" charset="-78"/>
+              </a:rPr>
+              <a:t>لایه</a:t>
+            </a:r>
+            <a:r>
+              <a:rPr sz="1050" b="0" i="0" dirty="0">
+                <a:solidFill>
+                  <a:srgbClr val="4B5563"/>
+                </a:solidFill>
+                <a:latin typeface="Tahoma"/>
+                <a:ea typeface="Tahoma"/>
+                <a:cs typeface="B Nazanin" panose="00000400000000000000" pitchFamily="2" charset="-78"/>
+              </a:rPr>
+              <a:t> </a:t>
+            </a:r>
+            <a:r>
+              <a:rPr sz="1050" b="0" i="0" dirty="0" smtClean="0">
+                <a:solidFill>
+                  <a:srgbClr val="4B5563"/>
+                </a:solidFill>
+                <a:latin typeface="Tahoma"/>
+                <a:ea typeface="Tahoma"/>
+                <a:cs typeface="B Nazanin" panose="00000400000000000000" pitchFamily="2" charset="-78"/>
+              </a:rPr>
+              <a:t>• ۸ </a:t>
+            </a:r>
+            <a:r>
+              <a:rPr sz="1050" b="0" i="0" dirty="0" err="1" smtClean="0">
+                <a:solidFill>
+                  <a:srgbClr val="4B5563"/>
+                </a:solidFill>
+                <a:latin typeface="Tahoma"/>
+                <a:ea typeface="Tahoma"/>
+                <a:cs typeface="B Nazanin" panose="00000400000000000000" pitchFamily="2" charset="-78"/>
+              </a:rPr>
+              <a:t>سر</a:t>
+            </a:r>
+            <a:r>
+              <a:rPr sz="1050" b="0" i="0" dirty="0" smtClean="0">
+                <a:solidFill>
+                  <a:srgbClr val="4B5563"/>
+                </a:solidFill>
+                <a:latin typeface="Tahoma"/>
+                <a:ea typeface="Tahoma"/>
+                <a:cs typeface="B Nazanin" panose="00000400000000000000" pitchFamily="2" charset="-78"/>
+              </a:rPr>
+              <a:t> </a:t>
+            </a:r>
+            <a:r>
+              <a:rPr sz="1050" b="0" i="0" dirty="0">
+                <a:solidFill>
+                  <a:srgbClr val="4B5563"/>
+                </a:solidFill>
+                <a:latin typeface="Tahoma"/>
+                <a:ea typeface="Tahoma"/>
+                <a:cs typeface="B Nazanin" panose="00000400000000000000" pitchFamily="2" charset="-78"/>
+              </a:rPr>
+              <a:t>• </a:t>
+            </a:r>
+            <a:r>
+              <a:rPr sz="1050" b="0" i="0" dirty="0" err="1">
+                <a:solidFill>
+                  <a:srgbClr val="4B5563"/>
+                </a:solidFill>
+                <a:latin typeface="Tahoma"/>
+                <a:ea typeface="Tahoma"/>
+                <a:cs typeface="B Nazanin" panose="00000400000000000000" pitchFamily="2" charset="-78"/>
+              </a:rPr>
+              <a:t>پیش‌خور</a:t>
+            </a:r>
+            <a:r>
+              <a:rPr sz="1050" b="0" i="0" dirty="0">
+                <a:solidFill>
+                  <a:srgbClr val="4B5563"/>
+                </a:solidFill>
+                <a:latin typeface="Tahoma"/>
+                <a:ea typeface="Tahoma"/>
+                <a:cs typeface="B Nazanin" panose="00000400000000000000" pitchFamily="2" charset="-78"/>
+              </a:rPr>
+              <a:t> ۱۰۲۴</a:t>
             </a:r>
           </a:p>
         </p:txBody>
@@ -5936,7 +7484,7 @@
         </p:nvSpPr>
         <p:spPr>
           <a:xfrm>
-            <a:off x="3798722" y="6583680"/>
+            <a:off x="4961538" y="6611111"/>
             <a:ext cx="3213506" cy="347472"/>
           </a:xfrm>
           <a:prstGeom prst="roundRect">
@@ -5969,7 +7517,7 @@
           </a:fontRef>
         </p:style>
         <p:txBody>
-          <a:bodyPr rtlCol="0" anchor="ctr" wrap="square" lIns="64008" rIns="64008" tIns="27432" bIns="27432">
+          <a:bodyPr wrap="square" lIns="64008" tIns="27432" rIns="64008" bIns="27432" rtlCol="0" anchor="ctr">
             <a:noAutofit/>
           </a:bodyPr>
           <a:lstStyle/>
@@ -5986,19 +7534,19 @@
               </a:spcAft>
             </a:pPr>
             <a:r>
-              <a:rPr sz="850" b="1" i="0">
+              <a:rPr sz="1100" b="1" i="0">
                 <a:solidFill>
                   <a:srgbClr val="1F2A37"/>
                 </a:solidFill>
                 <a:latin typeface="Tahoma"/>
                 <a:ea typeface="Tahoma"/>
-                <a:cs typeface="Tahoma"/>
+                <a:cs typeface="B Nazanin" panose="00000400000000000000" pitchFamily="2" charset="-78"/>
               </a:rPr>
               <a:t>بلوک TCN</a:t>
             </a:r>
           </a:p>
           <a:p>
-            <a:pPr rtl="1" algn="ctr">
+            <a:pPr algn="ctr" rtl="1">
               <a:lnSpc>
                 <a:spcPct val="100000"/>
               </a:lnSpc>
@@ -6010,13 +7558,13 @@
               </a:spcAft>
             </a:pPr>
             <a:r>
-              <a:rPr sz="680" b="0" i="0">
-                <a:solidFill>
-                  <a:srgbClr val="4B5563"/>
-                </a:solidFill>
-                <a:latin typeface="Tahoma"/>
-                <a:ea typeface="Tahoma"/>
-                <a:cs typeface="Tahoma"/>
+              <a:rPr sz="1050" b="0" i="0">
+                <a:solidFill>
+                  <a:srgbClr val="4B5563"/>
+                </a:solidFill>
+                <a:latin typeface="Tahoma"/>
+                <a:ea typeface="Tahoma"/>
+                <a:cs typeface="B Nazanin" panose="00000400000000000000" pitchFamily="2" charset="-78"/>
               </a:rPr>
               <a:t>۱۰ پیچش • کرنل ۳ • گشودگی ۱، ۲، ۴</a:t>
             </a:r>
@@ -6031,7 +7579,7 @@
         </p:nvSpPr>
         <p:spPr>
           <a:xfrm>
-            <a:off x="384047" y="6583680"/>
+            <a:off x="1546863" y="6611111"/>
             <a:ext cx="3213506" cy="347472"/>
           </a:xfrm>
           <a:prstGeom prst="roundRect">
@@ -6064,7 +7612,7 @@
           </a:fontRef>
         </p:style>
         <p:txBody>
-          <a:bodyPr rtlCol="0" anchor="ctr" wrap="square" lIns="64008" rIns="64008" tIns="27432" bIns="27432">
+          <a:bodyPr wrap="square" lIns="64008" tIns="27432" rIns="64008" bIns="27432" rtlCol="0" anchor="ctr">
             <a:noAutofit/>
           </a:bodyPr>
           <a:lstStyle/>
@@ -6081,19 +7629,52 @@
               </a:spcAft>
             </a:pPr>
             <a:r>
-              <a:rPr sz="850" b="1" i="0">
+              <a:rPr sz="1100" b="1" i="0" dirty="0" err="1">
                 <a:solidFill>
                   <a:srgbClr val="1F2A37"/>
                 </a:solidFill>
                 <a:latin typeface="Tahoma"/>
                 <a:ea typeface="Tahoma"/>
-                <a:cs typeface="Tahoma"/>
-              </a:rPr>
-              <a:t>گراف پیشوند (GNN)</a:t>
-            </a:r>
-          </a:p>
-          <a:p>
-            <a:pPr rtl="1" algn="ctr">
+                <a:cs typeface="B Nazanin" panose="00000400000000000000" pitchFamily="2" charset="-78"/>
+              </a:rPr>
+              <a:t>گراف</a:t>
+            </a:r>
+            <a:r>
+              <a:rPr sz="1100" b="1" i="0" dirty="0">
+                <a:solidFill>
+                  <a:srgbClr val="1F2A37"/>
+                </a:solidFill>
+                <a:latin typeface="Tahoma"/>
+                <a:ea typeface="Tahoma"/>
+                <a:cs typeface="B Nazanin" panose="00000400000000000000" pitchFamily="2" charset="-78"/>
+              </a:rPr>
+              <a:t> </a:t>
+            </a:r>
+            <a:r>
+              <a:rPr sz="1100" b="1" i="0" dirty="0" err="1">
+                <a:solidFill>
+                  <a:srgbClr val="1F2A37"/>
+                </a:solidFill>
+                <a:latin typeface="Tahoma"/>
+                <a:ea typeface="Tahoma"/>
+                <a:cs typeface="B Nazanin" panose="00000400000000000000" pitchFamily="2" charset="-78"/>
+              </a:rPr>
+              <a:t>پیشوند</a:t>
+            </a:r>
+            <a:r>
+              <a:rPr sz="1100" b="1" i="0" dirty="0">
+                <a:solidFill>
+                  <a:srgbClr val="1F2A37"/>
+                </a:solidFill>
+                <a:latin typeface="Tahoma"/>
+                <a:ea typeface="Tahoma"/>
+                <a:cs typeface="B Nazanin" panose="00000400000000000000" pitchFamily="2" charset="-78"/>
+              </a:rPr>
+              <a:t> (GNN)</a:t>
+            </a:r>
+          </a:p>
+          <a:p>
+            <a:pPr algn="ctr" rtl="1">
               <a:lnSpc>
                 <a:spcPct val="100000"/>
               </a:lnSpc>
@@ -6105,16 +7686,90 @@
               </a:spcAft>
             </a:pPr>
             <a:r>
-              <a:rPr sz="680" b="0" i="0">
-                <a:solidFill>
-                  <a:srgbClr val="4B5563"/>
-                </a:solidFill>
-                <a:latin typeface="Tahoma"/>
-                <a:ea typeface="Tahoma"/>
-                <a:cs typeface="Tahoma"/>
-              </a:rPr>
-              <a:t>۲ لایهٔ GCN + میانگین ماسک‌شده</a:t>
-            </a:r>
+              <a:rPr sz="1050" b="0" i="0" dirty="0">
+                <a:solidFill>
+                  <a:srgbClr val="4B5563"/>
+                </a:solidFill>
+                <a:latin typeface="Tahoma"/>
+                <a:ea typeface="Tahoma"/>
+                <a:cs typeface="B Nazanin" panose="00000400000000000000" pitchFamily="2" charset="-78"/>
+              </a:rPr>
+              <a:t>۲ </a:t>
+            </a:r>
+            <a:r>
+              <a:rPr sz="1050" b="0" i="0" dirty="0" err="1" smtClean="0">
+                <a:solidFill>
+                  <a:srgbClr val="4B5563"/>
+                </a:solidFill>
+                <a:latin typeface="Tahoma"/>
+                <a:ea typeface="Tahoma"/>
+                <a:cs typeface="B Nazanin" panose="00000400000000000000" pitchFamily="2" charset="-78"/>
+              </a:rPr>
+              <a:t>لایه</a:t>
+            </a:r>
+            <a:r>
+              <a:rPr sz="1050" b="0" i="0" dirty="0" smtClean="0">
+                <a:solidFill>
+                  <a:srgbClr val="4B5563"/>
+                </a:solidFill>
+                <a:latin typeface="Tahoma"/>
+                <a:ea typeface="Tahoma"/>
+                <a:cs typeface="B Nazanin" panose="00000400000000000000" pitchFamily="2" charset="-78"/>
+              </a:rPr>
+              <a:t> </a:t>
+            </a:r>
+            <a:r>
+              <a:rPr sz="1050" b="0" i="0" dirty="0">
+                <a:solidFill>
+                  <a:srgbClr val="4B5563"/>
+                </a:solidFill>
+                <a:latin typeface="Tahoma"/>
+                <a:ea typeface="Tahoma"/>
+                <a:cs typeface="B Nazanin" panose="00000400000000000000" pitchFamily="2" charset="-78"/>
+              </a:rPr>
+              <a:t>GCN + </a:t>
+            </a:r>
+            <a:r>
+              <a:rPr sz="1050" b="0" i="0" dirty="0" err="1">
+                <a:solidFill>
+                  <a:srgbClr val="4B5563"/>
+                </a:solidFill>
+                <a:latin typeface="Tahoma"/>
+                <a:ea typeface="Tahoma"/>
+                <a:cs typeface="B Nazanin" panose="00000400000000000000" pitchFamily="2" charset="-78"/>
+              </a:rPr>
+              <a:t>میانگین</a:t>
+            </a:r>
+            <a:r>
+              <a:rPr sz="1050" b="0" i="0" dirty="0">
+                <a:solidFill>
+                  <a:srgbClr val="4B5563"/>
+                </a:solidFill>
+                <a:latin typeface="Tahoma"/>
+                <a:ea typeface="Tahoma"/>
+                <a:cs typeface="B Nazanin" panose="00000400000000000000" pitchFamily="2" charset="-78"/>
+              </a:rPr>
+              <a:t> </a:t>
+            </a:r>
+            <a:r>
+              <a:rPr sz="1050" b="0" i="0" dirty="0" err="1">
+                <a:solidFill>
+                  <a:srgbClr val="4B5563"/>
+                </a:solidFill>
+                <a:latin typeface="Tahoma"/>
+                <a:ea typeface="Tahoma"/>
+                <a:cs typeface="B Nazanin" panose="00000400000000000000" pitchFamily="2" charset="-78"/>
+              </a:rPr>
+              <a:t>ماسک‌شده</a:t>
+            </a:r>
+            <a:endParaRPr sz="1050" b="0" i="0" dirty="0">
+              <a:solidFill>
+                <a:srgbClr val="4B5563"/>
+              </a:solidFill>
+              <a:latin typeface="Tahoma"/>
+              <a:ea typeface="Tahoma"/>
+              <a:cs typeface="B Nazanin" panose="00000400000000000000" pitchFamily="2" charset="-78"/>
+            </a:endParaRPr>
           </a:p>
         </p:txBody>
       </p:sp>
@@ -6126,7 +7781,7 @@
         </p:nvCxnSpPr>
         <p:spPr>
           <a:xfrm>
-            <a:off x="8820150" y="6455664"/>
+            <a:off x="9982966" y="6483095"/>
             <a:ext cx="0" cy="128016"/>
           </a:xfrm>
           <a:prstGeom prst="line">
@@ -6162,7 +7817,7 @@
         </p:nvCxnSpPr>
         <p:spPr>
           <a:xfrm>
-            <a:off x="5405475" y="6455664"/>
+            <a:off x="6568291" y="6483095"/>
             <a:ext cx="0" cy="128016"/>
           </a:xfrm>
           <a:prstGeom prst="line">
@@ -6198,7 +7853,7 @@
         </p:nvCxnSpPr>
         <p:spPr>
           <a:xfrm>
-            <a:off x="1990801" y="6455664"/>
+            <a:off x="3153617" y="6483095"/>
             <a:ext cx="0" cy="128016"/>
           </a:xfrm>
           <a:prstGeom prst="line">
@@ -6234,7 +7889,7 @@
         </p:nvSpPr>
         <p:spPr>
           <a:xfrm>
-            <a:off x="3798722" y="7059168"/>
+            <a:off x="4961538" y="7086599"/>
             <a:ext cx="6628180" cy="347472"/>
           </a:xfrm>
           <a:prstGeom prst="roundRect">
@@ -6267,7 +7922,7 @@
           </a:fontRef>
         </p:style>
         <p:txBody>
-          <a:bodyPr rtlCol="0" anchor="ctr" wrap="square" lIns="64008" rIns="64008" tIns="27432" bIns="27432">
+          <a:bodyPr wrap="square" lIns="64008" tIns="27432" rIns="64008" bIns="27432" rtlCol="0" anchor="ctr">
             <a:noAutofit/>
           </a:bodyPr>
           <a:lstStyle/>
@@ -6284,19 +7939,19 @@
               </a:spcAft>
             </a:pPr>
             <a:r>
-              <a:rPr sz="850" b="1" i="0">
+              <a:rPr sz="1100" b="1" i="0">
                 <a:solidFill>
                   <a:srgbClr val="1F2A37"/>
                 </a:solidFill>
                 <a:latin typeface="Tahoma"/>
                 <a:ea typeface="Tahoma"/>
-                <a:cs typeface="Tahoma"/>
+                <a:cs typeface="B Nazanin" panose="00000400000000000000" pitchFamily="2" charset="-78"/>
               </a:rPr>
               <a:t>ادغام توجه متقابل</a:t>
             </a:r>
           </a:p>
           <a:p>
-            <a:pPr rtl="1" algn="ctr">
+            <a:pPr algn="ctr" rtl="1">
               <a:lnSpc>
                 <a:spcPct val="100000"/>
               </a:lnSpc>
@@ -6308,13 +7963,13 @@
               </a:spcAft>
             </a:pPr>
             <a:r>
-              <a:rPr sz="680" b="0" i="0">
-                <a:solidFill>
-                  <a:srgbClr val="4B5563"/>
-                </a:solidFill>
-                <a:latin typeface="Tahoma"/>
-                <a:ea typeface="Tahoma"/>
-                <a:cs typeface="Tahoma"/>
+              <a:rPr sz="1050" b="0" i="0">
+                <a:solidFill>
+                  <a:srgbClr val="4B5563"/>
+                </a:solidFill>
+                <a:latin typeface="Tahoma"/>
+                <a:ea typeface="Tahoma"/>
+                <a:cs typeface="B Nazanin" panose="00000400000000000000" pitchFamily="2" charset="-78"/>
               </a:rPr>
               <a:t>توجه چندسری + اتصال باقیمانده + FFN</a:t>
             </a:r>
@@ -6329,7 +7984,7 @@
         </p:nvSpPr>
         <p:spPr>
           <a:xfrm>
-            <a:off x="384047" y="7059168"/>
+            <a:off x="1546863" y="7086599"/>
             <a:ext cx="3213506" cy="347472"/>
           </a:xfrm>
           <a:prstGeom prst="roundRect">
@@ -6362,7 +8017,7 @@
           </a:fontRef>
         </p:style>
         <p:txBody>
-          <a:bodyPr rtlCol="0" anchor="ctr" wrap="square" lIns="64008" rIns="64008" tIns="27432" bIns="27432">
+          <a:bodyPr wrap="square" lIns="64008" tIns="27432" rIns="64008" bIns="27432" rtlCol="0" anchor="ctr">
             <a:noAutofit/>
           </a:bodyPr>
           <a:lstStyle/>
@@ -6379,19 +8034,19 @@
               </a:spcAft>
             </a:pPr>
             <a:r>
-              <a:rPr sz="850" b="1" i="0">
+              <a:rPr sz="1100" b="1" i="0">
                 <a:solidFill>
                   <a:srgbClr val="1F2A37"/>
                 </a:solidFill>
                 <a:latin typeface="Tahoma"/>
                 <a:ea typeface="Tahoma"/>
-                <a:cs typeface="Tahoma"/>
+                <a:cs typeface="B Nazanin" panose="00000400000000000000" pitchFamily="2" charset="-78"/>
               </a:rPr>
               <a:t>ادغام ترتیبی</a:t>
             </a:r>
           </a:p>
           <a:p>
-            <a:pPr rtl="1" algn="ctr">
+            <a:pPr algn="ctr" rtl="1">
               <a:lnSpc>
                 <a:spcPct val="100000"/>
               </a:lnSpc>
@@ -6403,13 +8058,13 @@
               </a:spcAft>
             </a:pPr>
             <a:r>
-              <a:rPr sz="680" b="0" i="0">
-                <a:solidFill>
-                  <a:srgbClr val="4B5563"/>
-                </a:solidFill>
-                <a:latin typeface="Tahoma"/>
-                <a:ea typeface="Tahoma"/>
-                <a:cs typeface="Tahoma"/>
+              <a:rPr sz="1050" b="0" i="0">
+                <a:solidFill>
+                  <a:srgbClr val="4B5563"/>
+                </a:solidFill>
+                <a:latin typeface="Tahoma"/>
+                <a:ea typeface="Tahoma"/>
+                <a:cs typeface="B Nazanin" panose="00000400000000000000" pitchFamily="2" charset="-78"/>
               </a:rPr>
               <a:t>آخرین موقعیت معتبر پیشوند</a:t>
             </a:r>
@@ -6424,7 +8079,7 @@
         </p:nvCxnSpPr>
         <p:spPr>
           <a:xfrm>
-            <a:off x="8820150" y="6931152"/>
+            <a:off x="9982966" y="6958583"/>
             <a:ext cx="0" cy="128016"/>
           </a:xfrm>
           <a:prstGeom prst="line">
@@ -6460,7 +8115,7 @@
         </p:nvCxnSpPr>
         <p:spPr>
           <a:xfrm>
-            <a:off x="5405475" y="6931152"/>
+            <a:off x="6568291" y="6958583"/>
             <a:ext cx="0" cy="128016"/>
           </a:xfrm>
           <a:prstGeom prst="line">
@@ -6496,7 +8151,7 @@
         </p:nvCxnSpPr>
         <p:spPr>
           <a:xfrm>
-            <a:off x="1990801" y="6931152"/>
+            <a:off x="3153617" y="6958583"/>
             <a:ext cx="0" cy="128016"/>
           </a:xfrm>
           <a:prstGeom prst="line">
@@ -6532,7 +8187,7 @@
         </p:nvSpPr>
         <p:spPr>
           <a:xfrm>
-            <a:off x="384048" y="7534656"/>
+            <a:off x="1546864" y="7562087"/>
             <a:ext cx="10042855" cy="347472"/>
           </a:xfrm>
           <a:prstGeom prst="roundRect">
@@ -6565,7 +8220,7 @@
           </a:fontRef>
         </p:style>
         <p:txBody>
-          <a:bodyPr rtlCol="0" anchor="ctr" wrap="square" lIns="64008" rIns="64008" tIns="27432" bIns="27432">
+          <a:bodyPr wrap="square" lIns="64008" tIns="27432" rIns="64008" bIns="27432" rtlCol="0" anchor="ctr">
             <a:noAutofit/>
           </a:bodyPr>
           <a:lstStyle/>
@@ -6582,19 +8237,19 @@
               </a:spcAft>
             </a:pPr>
             <a:r>
-              <a:rPr sz="850" b="1" i="0">
+              <a:rPr sz="1100" b="1" i="0">
                 <a:solidFill>
                   <a:srgbClr val="1F2A37"/>
                 </a:solidFill>
                 <a:latin typeface="Tahoma"/>
                 <a:ea typeface="Tahoma"/>
-                <a:cs typeface="Tahoma"/>
+                <a:cs typeface="B Nazanin" panose="00000400000000000000" pitchFamily="2" charset="-78"/>
               </a:rPr>
               <a:t>ادغام نهایی — MLP سه‌جریانه</a:t>
             </a:r>
           </a:p>
           <a:p>
-            <a:pPr rtl="1" algn="ctr">
+            <a:pPr algn="ctr" rtl="1">
               <a:lnSpc>
                 <a:spcPct val="100000"/>
               </a:lnSpc>
@@ -6606,13 +8261,13 @@
               </a:spcAft>
             </a:pPr>
             <a:r>
-              <a:rPr sz="680" b="0" i="0">
-                <a:solidFill>
-                  <a:srgbClr val="4B5563"/>
-                </a:solidFill>
-                <a:latin typeface="Tahoma"/>
-                <a:ea typeface="Tahoma"/>
-                <a:cs typeface="Tahoma"/>
+              <a:rPr sz="1050" b="0" i="0">
+                <a:solidFill>
+                  <a:srgbClr val="4B5563"/>
+                </a:solidFill>
+                <a:latin typeface="Tahoma"/>
+                <a:ea typeface="Tahoma"/>
+                <a:cs typeface="B Nazanin" panose="00000400000000000000" pitchFamily="2" charset="-78"/>
               </a:rPr>
               <a:t>ترتیب + گراف + تعامل • ابعاد ۷۶۸ به ۵۱۲ به ۲۵۶ • بازنمایی مشترک: LayerNorm + GELU</a:t>
             </a:r>
@@ -6627,7 +8282,7 @@
         </p:nvCxnSpPr>
         <p:spPr>
           <a:xfrm>
-            <a:off x="8820150" y="7406640"/>
+            <a:off x="9982966" y="7434071"/>
             <a:ext cx="0" cy="128016"/>
           </a:xfrm>
           <a:prstGeom prst="line">
@@ -6663,7 +8318,7 @@
         </p:nvCxnSpPr>
         <p:spPr>
           <a:xfrm>
-            <a:off x="5405475" y="7406640"/>
+            <a:off x="6568291" y="7434071"/>
             <a:ext cx="0" cy="128016"/>
           </a:xfrm>
           <a:prstGeom prst="line">
@@ -6699,7 +8354,7 @@
         </p:nvCxnSpPr>
         <p:spPr>
           <a:xfrm>
-            <a:off x="1990801" y="7406640"/>
+            <a:off x="3153617" y="7434071"/>
             <a:ext cx="0" cy="128016"/>
           </a:xfrm>
           <a:prstGeom prst="line">
@@ -6735,7 +8390,7 @@
         </p:nvSpPr>
         <p:spPr>
           <a:xfrm>
-            <a:off x="8067065" y="8010144"/>
+            <a:off x="9229881" y="8037575"/>
             <a:ext cx="2359837" cy="347472"/>
           </a:xfrm>
           <a:prstGeom prst="roundRect">
@@ -6768,7 +8423,7 @@
           </a:fontRef>
         </p:style>
         <p:txBody>
-          <a:bodyPr rtlCol="0" anchor="ctr" wrap="square" lIns="64008" rIns="64008" tIns="27432" bIns="27432">
+          <a:bodyPr wrap="square" lIns="64008" tIns="27432" rIns="64008" bIns="27432" rtlCol="0" anchor="ctr">
             <a:noAutofit/>
           </a:bodyPr>
           <a:lstStyle/>
@@ -6785,19 +8440,19 @@
               </a:spcAft>
             </a:pPr>
             <a:r>
-              <a:rPr sz="850" b="1" i="0">
+              <a:rPr sz="1100" b="1" i="0">
                 <a:solidFill>
                   <a:srgbClr val="1F2A37"/>
                 </a:solidFill>
                 <a:latin typeface="Tahoma"/>
                 <a:ea typeface="Tahoma"/>
-                <a:cs typeface="Tahoma"/>
+                <a:cs typeface="B Nazanin" panose="00000400000000000000" pitchFamily="2" charset="-78"/>
               </a:rPr>
               <a:t>سر فعالیت</a:t>
             </a:r>
           </a:p>
           <a:p>
-            <a:pPr rtl="1" algn="ctr">
+            <a:pPr algn="ctr" rtl="1">
               <a:lnSpc>
                 <a:spcPct val="100000"/>
               </a:lnSpc>
@@ -6809,13 +8464,13 @@
               </a:spcAft>
             </a:pPr>
             <a:r>
-              <a:rPr sz="680" b="0" i="0">
-                <a:solidFill>
-                  <a:srgbClr val="4B5563"/>
-                </a:solidFill>
-                <a:latin typeface="Tahoma"/>
-                <a:ea typeface="Tahoma"/>
-                <a:cs typeface="Tahoma"/>
+              <a:rPr sz="1050" b="0" i="0">
+                <a:solidFill>
+                  <a:srgbClr val="4B5563"/>
+                </a:solidFill>
+                <a:latin typeface="Tahoma"/>
+                <a:ea typeface="Tahoma"/>
+                <a:cs typeface="B Nazanin" panose="00000400000000000000" pitchFamily="2" charset="-78"/>
               </a:rPr>
               <a:t>فعالیت بعدی</a:t>
             </a:r>
@@ -6830,7 +8485,7 @@
         </p:nvSpPr>
         <p:spPr>
           <a:xfrm>
-            <a:off x="5506059" y="8010144"/>
+            <a:off x="6668875" y="8037575"/>
             <a:ext cx="2359837" cy="347472"/>
           </a:xfrm>
           <a:prstGeom prst="roundRect">
@@ -6863,7 +8518,7 @@
           </a:fontRef>
         </p:style>
         <p:txBody>
-          <a:bodyPr rtlCol="0" anchor="ctr" wrap="square" lIns="64008" rIns="64008" tIns="27432" bIns="27432">
+          <a:bodyPr wrap="square" lIns="64008" tIns="27432" rIns="64008" bIns="27432" rtlCol="0" anchor="ctr">
             <a:noAutofit/>
           </a:bodyPr>
           <a:lstStyle/>
@@ -6880,19 +8535,19 @@
               </a:spcAft>
             </a:pPr>
             <a:r>
-              <a:rPr sz="850" b="1" i="0">
+              <a:rPr sz="1100" b="1" i="0">
                 <a:solidFill>
                   <a:srgbClr val="1F2A37"/>
                 </a:solidFill>
                 <a:latin typeface="Tahoma"/>
                 <a:ea typeface="Tahoma"/>
-                <a:cs typeface="Tahoma"/>
+                <a:cs typeface="B Nazanin" panose="00000400000000000000" pitchFamily="2" charset="-78"/>
               </a:rPr>
               <a:t>سر زمان باقی‌مانده</a:t>
             </a:r>
           </a:p>
           <a:p>
-            <a:pPr rtl="1" algn="ctr">
+            <a:pPr algn="ctr" rtl="1">
               <a:lnSpc>
                 <a:spcPct val="100000"/>
               </a:lnSpc>
@@ -6904,13 +8559,13 @@
               </a:spcAft>
             </a:pPr>
             <a:r>
-              <a:rPr sz="680" b="0" i="0">
-                <a:solidFill>
-                  <a:srgbClr val="4B5563"/>
-                </a:solidFill>
-                <a:latin typeface="Tahoma"/>
-                <a:ea typeface="Tahoma"/>
-                <a:cs typeface="Tahoma"/>
+              <a:rPr sz="1050" b="0" i="0">
+                <a:solidFill>
+                  <a:srgbClr val="4B5563"/>
+                </a:solidFill>
+                <a:latin typeface="Tahoma"/>
+                <a:ea typeface="Tahoma"/>
+                <a:cs typeface="B Nazanin" panose="00000400000000000000" pitchFamily="2" charset="-78"/>
               </a:rPr>
               <a:t>رگرسیون زمان</a:t>
             </a:r>
@@ -6925,7 +8580,7 @@
         </p:nvSpPr>
         <p:spPr>
           <a:xfrm>
-            <a:off x="2945053" y="8010144"/>
+            <a:off x="4107869" y="8037575"/>
             <a:ext cx="2359837" cy="347472"/>
           </a:xfrm>
           <a:prstGeom prst="roundRect">
@@ -6958,7 +8613,7 @@
           </a:fontRef>
         </p:style>
         <p:txBody>
-          <a:bodyPr rtlCol="0" anchor="ctr" wrap="square" lIns="64008" rIns="64008" tIns="27432" bIns="27432">
+          <a:bodyPr wrap="square" lIns="64008" tIns="27432" rIns="64008" bIns="27432" rtlCol="0" anchor="ctr">
             <a:noAutofit/>
           </a:bodyPr>
           <a:lstStyle/>
@@ -6975,19 +8630,19 @@
               </a:spcAft>
             </a:pPr>
             <a:r>
-              <a:rPr sz="850" b="1" i="0">
+              <a:rPr sz="1100" b="1" i="0">
                 <a:solidFill>
                   <a:srgbClr val="1F2A37"/>
                 </a:solidFill>
                 <a:latin typeface="Tahoma"/>
                 <a:ea typeface="Tahoma"/>
-                <a:cs typeface="Tahoma"/>
+                <a:cs typeface="B Nazanin" panose="00000400000000000000" pitchFamily="2" charset="-78"/>
               </a:rPr>
               <a:t>سر بهبود</a:t>
             </a:r>
           </a:p>
           <a:p>
-            <a:pPr rtl="1" algn="ctr">
+            <a:pPr algn="ctr" rtl="1">
               <a:lnSpc>
                 <a:spcPct val="100000"/>
               </a:lnSpc>
@@ -6999,13 +8654,13 @@
               </a:spcAft>
             </a:pPr>
             <a:r>
-              <a:rPr sz="680" b="0" i="0">
-                <a:solidFill>
-                  <a:srgbClr val="4B5563"/>
-                </a:solidFill>
-                <a:latin typeface="Tahoma"/>
-                <a:ea typeface="Tahoma"/>
-                <a:cs typeface="Tahoma"/>
+              <a:rPr sz="1050" b="0" i="0">
+                <a:solidFill>
+                  <a:srgbClr val="4B5563"/>
+                </a:solidFill>
+                <a:latin typeface="Tahoma"/>
+                <a:ea typeface="Tahoma"/>
+                <a:cs typeface="B Nazanin" panose="00000400000000000000" pitchFamily="2" charset="-78"/>
               </a:rPr>
               <a:t>کاهش تأخیر + Tanh</a:t>
             </a:r>
@@ -7020,7 +8675,7 @@
         </p:nvSpPr>
         <p:spPr>
           <a:xfrm>
-            <a:off x="384047" y="8010144"/>
+            <a:off x="1546863" y="8037575"/>
             <a:ext cx="2359837" cy="347472"/>
           </a:xfrm>
           <a:prstGeom prst="roundRect">
@@ -7053,7 +8708,7 @@
           </a:fontRef>
         </p:style>
         <p:txBody>
-          <a:bodyPr rtlCol="0" anchor="ctr" wrap="square" lIns="64008" rIns="64008" tIns="27432" bIns="27432">
+          <a:bodyPr wrap="square" lIns="64008" tIns="27432" rIns="64008" bIns="27432" rtlCol="0" anchor="ctr">
             <a:noAutofit/>
           </a:bodyPr>
           <a:lstStyle/>
@@ -7070,19 +8725,19 @@
               </a:spcAft>
             </a:pPr>
             <a:r>
-              <a:rPr sz="850" b="1" i="0">
+              <a:rPr sz="1100" b="1" i="0">
                 <a:solidFill>
                   <a:srgbClr val="1F2A37"/>
                 </a:solidFill>
                 <a:latin typeface="Tahoma"/>
                 <a:ea typeface="Tahoma"/>
-                <a:cs typeface="Tahoma"/>
+                <a:cs typeface="B Nazanin" panose="00000400000000000000" pitchFamily="2" charset="-78"/>
               </a:rPr>
               <a:t>سر گلوگاه</a:t>
             </a:r>
           </a:p>
           <a:p>
-            <a:pPr rtl="1" algn="ctr">
+            <a:pPr algn="ctr" rtl="1">
               <a:lnSpc>
                 <a:spcPct val="100000"/>
               </a:lnSpc>
@@ -7094,13 +8749,13 @@
               </a:spcAft>
             </a:pPr>
             <a:r>
-              <a:rPr sz="680" b="0" i="0">
-                <a:solidFill>
-                  <a:srgbClr val="4B5563"/>
-                </a:solidFill>
-                <a:latin typeface="Tahoma"/>
-                <a:ea typeface="Tahoma"/>
-                <a:cs typeface="Tahoma"/>
+              <a:rPr sz="1050" b="0" i="0">
+                <a:solidFill>
+                  <a:srgbClr val="4B5563"/>
+                </a:solidFill>
+                <a:latin typeface="Tahoma"/>
+                <a:ea typeface="Tahoma"/>
+                <a:cs typeface="B Nazanin" panose="00000400000000000000" pitchFamily="2" charset="-78"/>
               </a:rPr>
               <a:t>گلوگاه هر موقعیت</a:t>
             </a:r>
@@ -7115,7 +8770,7 @@
         </p:nvCxnSpPr>
         <p:spPr>
           <a:xfrm>
-            <a:off x="9246984" y="7882128"/>
+            <a:off x="10409800" y="7909559"/>
             <a:ext cx="0" cy="128016"/>
           </a:xfrm>
           <a:prstGeom prst="line">
@@ -7151,7 +8806,7 @@
         </p:nvCxnSpPr>
         <p:spPr>
           <a:xfrm>
-            <a:off x="6685978" y="7882128"/>
+            <a:off x="7848794" y="7909559"/>
             <a:ext cx="0" cy="128016"/>
           </a:xfrm>
           <a:prstGeom prst="line">
@@ -7187,7 +8842,7 @@
         </p:nvCxnSpPr>
         <p:spPr>
           <a:xfrm>
-            <a:off x="4124972" y="7882128"/>
+            <a:off x="5287788" y="7909559"/>
             <a:ext cx="0" cy="128016"/>
           </a:xfrm>
           <a:prstGeom prst="line">
@@ -7223,7 +8878,7 @@
         </p:nvCxnSpPr>
         <p:spPr>
           <a:xfrm>
-            <a:off x="1563966" y="7882128"/>
+            <a:off x="2726782" y="7909559"/>
             <a:ext cx="0" cy="128016"/>
           </a:xfrm>
           <a:prstGeom prst="line">
@@ -7259,7 +8914,7 @@
         </p:nvSpPr>
         <p:spPr>
           <a:xfrm>
-            <a:off x="384048" y="8412480"/>
+            <a:off x="1546864" y="8439911"/>
             <a:ext cx="10042855" cy="201168"/>
           </a:xfrm>
           <a:prstGeom prst="rect">
@@ -7268,12 +8923,12 @@
           <a:noFill/>
         </p:spPr>
         <p:txBody>
-          <a:bodyPr wrap="square" lIns="18288" rIns="18288" tIns="9144" bIns="9144" anchor="ctr">
+          <a:bodyPr wrap="square" lIns="18288" tIns="9144" rIns="18288" bIns="9144" anchor="ctr">
             <a:noAutofit/>
           </a:bodyPr>
           <a:lstStyle/>
           <a:p>
-            <a:pPr rtl="1" algn="ctr">
+            <a:pPr algn="ctr" rtl="1">
               <a:lnSpc>
                 <a:spcPct val="100000"/>
               </a:lnSpc>
@@ -7285,19 +8940,91 @@
               </a:spcAft>
             </a:pPr>
             <a:r>
-              <a:rPr sz="700" b="0" i="0">
+              <a:rPr sz="1050" b="0" i="0">
                 <a:solidFill>
                   <a:srgbClr val="6B7280"/>
                 </a:solidFill>
                 <a:latin typeface="Tahoma"/>
                 <a:ea typeface="Tahoma"/>
-                <a:cs typeface="Tahoma"/>
+                <a:cs typeface="B Nazanin" panose="00000400000000000000" pitchFamily="2" charset="-78"/>
               </a:rPr>
               <a:t>آموزش: زیان وزنی چندوظیفه‌ای (Cross-Entropy + Huber + Huber + BCE) • AdamW • Warmup + Cosine • برش گرادیان • SWA</a:t>
             </a:r>
           </a:p>
         </p:txBody>
       </p:sp>
+      <p:cxnSp>
+        <p:nvCxnSpPr>
+          <p:cNvPr id="69" name="Elbow Connector 68"/>
+          <p:cNvCxnSpPr>
+            <a:stCxn id="22" idx="1"/>
+            <a:endCxn id="25" idx="0"/>
+          </p:cNvCxnSpPr>
+          <p:nvPr/>
+        </p:nvCxnSpPr>
+        <p:spPr>
+          <a:xfrm rot="10800000" flipV="1">
+            <a:off x="3153617" y="3877055"/>
+            <a:ext cx="854355" cy="402336"/>
+          </a:xfrm>
+          <a:prstGeom prst="bentConnector2">
+            <a:avLst/>
+          </a:prstGeom>
+          <a:ln>
+            <a:tailEnd type="triangle"/>
+          </a:ln>
+        </p:spPr>
+        <p:style>
+          <a:lnRef idx="2">
+            <a:schemeClr val="accent1"/>
+          </a:lnRef>
+          <a:fillRef idx="0">
+            <a:schemeClr val="accent1"/>
+          </a:fillRef>
+          <a:effectRef idx="1">
+            <a:schemeClr val="accent1"/>
+          </a:effectRef>
+          <a:fontRef idx="minor">
+            <a:schemeClr val="tx1"/>
+          </a:fontRef>
+        </p:style>
+      </p:cxnSp>
+      <p:cxnSp>
+        <p:nvCxnSpPr>
+          <p:cNvPr id="71" name="Elbow Connector 70"/>
+          <p:cNvCxnSpPr>
+            <a:stCxn id="22" idx="3"/>
+            <a:endCxn id="23" idx="0"/>
+          </p:cNvCxnSpPr>
+          <p:nvPr/>
+        </p:nvCxnSpPr>
+        <p:spPr>
+          <a:xfrm>
+            <a:off x="9128611" y="3877055"/>
+            <a:ext cx="854354" cy="402336"/>
+          </a:xfrm>
+          <a:prstGeom prst="bentConnector2">
+            <a:avLst/>
+          </a:prstGeom>
+          <a:ln>
+            <a:tailEnd type="triangle"/>
+          </a:ln>
+        </p:spPr>
+        <p:style>
+          <a:lnRef idx="2">
+            <a:schemeClr val="accent1"/>
+          </a:lnRef>
+          <a:fillRef idx="0">
+            <a:schemeClr val="accent1"/>
+          </a:fillRef>
+          <a:effectRef idx="1">
+            <a:schemeClr val="accent1"/>
+          </a:effectRef>
+          <a:fontRef idx="minor">
+            <a:schemeClr val="tx1"/>
+          </a:fontRef>
+        </p:style>
+      </p:cxnSp>
     </p:spTree>
   </p:cSld>
   <p:clrMapOvr>
